--- a/business-ops/지명원/엣지컴퍼니_지명원.pptx
+++ b/business-ops/지명원/엣지컴퍼니_지명원.pptx
@@ -24,6 +24,7 @@
     <p:sldId id="272" r:id="rId23"/>
     <p:sldId id="273" r:id="rId24"/>
     <p:sldId id="274" r:id="rId25"/>
+    <p:sldId id="275" r:id="rId26"/>
   </p:sldIdLst>
   <p:sldSz cx="12191695" cy="6858000" type="screen4x3"/>
   <p:notesSz cx="6858000" cy="9144000"/>
@@ -12245,7 +12246,7 @@
                 </a:solidFill>
                 <a:latin typeface="맑은 고딕"/>
               </a:rPr>
-              <a:t>ACRO 스마트홈 — 국내 최초 통합 앱</a:t>
+              <a:t>유상옵션</a:t>
             </a:r>
           </a:p>
         </p:txBody>
@@ -12284,7 +12285,7 @@
                 </a:solidFill>
                 <a:latin typeface="맑은 고딕"/>
               </a:rPr>
-              <a:t>Smart-Home System</a:t>
+              <a:t>Paid Options</a:t>
             </a:r>
           </a:p>
         </p:txBody>
@@ -12374,23 +12375,64 @@
       </p:sp>
       <p:sp>
         <p:nvSpPr>
-          <p:cNvPr id="7" name="Rounded Rectangle 6"/>
+          <p:cNvPr id="7" name="TextBox 6"/>
+          <p:cNvSpPr txBox="1"/>
+          <p:nvPr/>
+        </p:nvSpPr>
+        <p:spPr>
+          <a:xfrm>
+            <a:off x="640080" y="1664208"/>
+            <a:ext cx="10972800" cy="320040"/>
+          </a:xfrm>
+          <a:prstGeom prst="rect">
+            <a:avLst/>
+          </a:prstGeom>
+          <a:noFill/>
+        </p:spPr>
+        <p:txBody>
+          <a:bodyPr wrap="square" lIns="0" rIns="0" tIns="0" bIns="0" anchor="t">
+            <a:spAutoFit/>
+          </a:bodyPr>
+          <a:lstStyle/>
+          <a:p>
+            <a:pPr algn="l">
+              <a:lnSpc>
+                <a:spcPct val="100000"/>
+              </a:lnSpc>
+            </a:pPr>
+            <a:r>
+              <a:rPr sz="1200" b="0">
+                <a:solidFill>
+                  <a:srgbClr val="3A4456"/>
+                </a:solidFill>
+                <a:latin typeface="맑은 고딕"/>
+              </a:rPr>
+              <a:t>입주 단지 공동구매·유상옵션으로 함께 제공합니다.</a:t>
+            </a:r>
+          </a:p>
+        </p:txBody>
+      </p:sp>
+      <p:sp>
+        <p:nvSpPr>
+          <p:cNvPr id="8" name="Rounded Rectangle 7"/>
           <p:cNvSpPr/>
           <p:nvPr/>
         </p:nvSpPr>
         <p:spPr>
           <a:xfrm>
-            <a:off x="640080" y="1737360"/>
-            <a:ext cx="10972800" cy="1143000"/>
+            <a:off x="640080" y="2148840"/>
+            <a:ext cx="3474720" cy="1828800"/>
           </a:xfrm>
           <a:prstGeom prst="roundRect">
             <a:avLst/>
           </a:prstGeom>
           <a:solidFill>
-            <a:srgbClr val="12347A"/>
+            <a:srgbClr val="FFFFFF"/>
           </a:solidFill>
-          <a:ln>
-            <a:noFill/>
+          <a:ln w="12700">
+            <a:solidFill>
+              <a:srgbClr val="E3E8F0"/>
+            </a:solidFill>
           </a:ln>
           <a:effectLst/>
         </p:spPr>
@@ -12418,459 +12460,14 @@
       </p:sp>
       <p:sp>
         <p:nvSpPr>
-          <p:cNvPr id="8" name="TextBox 7"/>
-          <p:cNvSpPr txBox="1"/>
-          <p:nvPr/>
-        </p:nvSpPr>
-        <p:spPr>
-          <a:xfrm>
-            <a:off x="914400" y="1874519"/>
-            <a:ext cx="10424160" cy="320040"/>
-          </a:xfrm>
-          <a:prstGeom prst="rect">
-            <a:avLst/>
-          </a:prstGeom>
-          <a:noFill/>
-        </p:spPr>
-        <p:txBody>
-          <a:bodyPr wrap="square" lIns="0" rIns="0" tIns="0" bIns="0" anchor="t">
-            <a:spAutoFit/>
-          </a:bodyPr>
-          <a:lstStyle/>
-          <a:p>
-            <a:pPr algn="l">
-              <a:lnSpc>
-                <a:spcPct val="100000"/>
-              </a:lnSpc>
-            </a:pPr>
-            <a:r>
-              <a:rPr sz="1100" b="1">
-                <a:solidFill>
-                  <a:srgbClr val="CADCFC"/>
-                </a:solidFill>
-                <a:latin typeface="맑은 고딕"/>
-              </a:rPr>
-              <a:t>KOREA FIRST · 자체 개발</a:t>
-            </a:r>
-          </a:p>
-        </p:txBody>
-      </p:sp>
-      <p:sp>
-        <p:nvSpPr>
-          <p:cNvPr id="9" name="TextBox 8"/>
-          <p:cNvSpPr txBox="1"/>
-          <p:nvPr/>
-        </p:nvSpPr>
-        <p:spPr>
-          <a:xfrm>
-            <a:off x="914400" y="2194560"/>
-            <a:ext cx="10424160" cy="640080"/>
-          </a:xfrm>
-          <a:prstGeom prst="rect">
-            <a:avLst/>
-          </a:prstGeom>
-          <a:noFill/>
-        </p:spPr>
-        <p:txBody>
-          <a:bodyPr wrap="square" lIns="0" rIns="0" tIns="0" bIns="0" anchor="t">
-            <a:spAutoFit/>
-          </a:bodyPr>
-          <a:lstStyle/>
-          <a:p>
-            <a:pPr algn="l">
-              <a:lnSpc>
-                <a:spcPct val="115000"/>
-              </a:lnSpc>
-            </a:pPr>
-            <a:r>
-              <a:rPr sz="1700" b="1">
-                <a:solidFill>
-                  <a:srgbClr val="FFFFFF"/>
-                </a:solidFill>
-                <a:latin typeface="맑은 고딕"/>
-              </a:rPr>
-              <a:t>실링팬 · 전동커튼 · 스위치 · 조명 디밍을 하나의 앱으로 통합 제어</a:t>
-            </a:r>
-          </a:p>
-          <a:p>
-            <a:pPr algn="l">
-              <a:lnSpc>
-                <a:spcPct val="115000"/>
-              </a:lnSpc>
-            </a:pPr>
-            <a:r>
-              <a:rPr sz="1300" b="1">
-                <a:solidFill>
-                  <a:srgbClr val="CADCFC"/>
-                </a:solidFill>
-                <a:latin typeface="맑은 고딕"/>
-              </a:rPr>
-              <a:t>— 국내 최초 자체 개발 스마트홈 시스템 기술</a:t>
-            </a:r>
-          </a:p>
-        </p:txBody>
-      </p:sp>
-      <p:sp>
-        <p:nvSpPr>
-          <p:cNvPr id="10" name="Rounded Rectangle 9"/>
+          <p:cNvPr id="9" name="Rounded Rectangle 8"/>
           <p:cNvSpPr/>
           <p:nvPr/>
         </p:nvSpPr>
         <p:spPr>
           <a:xfrm>
-            <a:off x="2331720" y="3108960"/>
-            <a:ext cx="2377440" cy="2286000"/>
-          </a:xfrm>
-          <a:prstGeom prst="roundRect">
-            <a:avLst/>
-          </a:prstGeom>
-          <a:solidFill>
-            <a:srgbClr val="F3F6FC"/>
-          </a:solidFill>
-          <a:ln w="19050">
-            <a:solidFill>
-              <a:srgbClr val="B9C6DD"/>
-            </a:solidFill>
-          </a:ln>
-          <a:effectLst/>
-        </p:spPr>
-        <p:style>
-          <a:lnRef idx="1">
-            <a:schemeClr val="accent1"/>
-          </a:lnRef>
-          <a:fillRef idx="3">
-            <a:schemeClr val="accent1"/>
-          </a:fillRef>
-          <a:effectRef idx="2">
-            <a:schemeClr val="accent1"/>
-          </a:effectRef>
-          <a:fontRef idx="minor">
-            <a:schemeClr val="lt1"/>
-          </a:fontRef>
-        </p:style>
-        <p:txBody>
-          <a:bodyPr rtlCol="0" anchor="ctr"/>
-          <a:lstStyle/>
-          <a:p>
-            <a:pPr algn="ctr"/>
-          </a:p>
-        </p:txBody>
-      </p:sp>
-      <p:sp>
-        <p:nvSpPr>
-          <p:cNvPr id="11" name="TextBox 10"/>
-          <p:cNvSpPr txBox="1"/>
-          <p:nvPr/>
-        </p:nvSpPr>
-        <p:spPr>
-          <a:xfrm>
-            <a:off x="2331720" y="3657600"/>
-            <a:ext cx="2377440" cy="1280160"/>
-          </a:xfrm>
-          <a:prstGeom prst="rect">
-            <a:avLst/>
-          </a:prstGeom>
-          <a:noFill/>
-        </p:spPr>
-        <p:txBody>
-          <a:bodyPr wrap="square" lIns="0" rIns="0" tIns="0" bIns="0" anchor="ctr">
-            <a:spAutoFit/>
-          </a:bodyPr>
-          <a:lstStyle/>
-          <a:p>
-            <a:pPr algn="ctr">
-              <a:lnSpc>
-                <a:spcPct val="120000"/>
-              </a:lnSpc>
-            </a:pPr>
-            <a:r>
-              <a:rPr sz="2400" b="0">
-                <a:solidFill>
-                  <a:srgbClr val="7F8BA0"/>
-                </a:solidFill>
-                <a:latin typeface="맑은 고딕"/>
-              </a:rPr>
-              <a:t>📱</a:t>
-            </a:r>
-          </a:p>
-          <a:p>
-            <a:pPr algn="ctr">
-              <a:lnSpc>
-                <a:spcPct val="120000"/>
-              </a:lnSpc>
-            </a:pPr>
-            <a:r>
-              <a:rPr sz="1150" b="1">
-                <a:solidFill>
-                  <a:srgbClr val="48566B"/>
-                </a:solidFill>
-                <a:latin typeface="맑은 고딕"/>
-              </a:rPr>
-              <a:t>홈 대시보드</a:t>
-            </a:r>
-          </a:p>
-          <a:p>
-            <a:pPr algn="ctr">
-              <a:lnSpc>
-                <a:spcPct val="120000"/>
-              </a:lnSpc>
-            </a:pPr>
-            <a:r>
-              <a:rPr sz="950" b="0">
-                <a:solidFill>
-                  <a:srgbClr val="92A0B5"/>
-                </a:solidFill>
-                <a:latin typeface="맑은 고딕"/>
-              </a:rPr>
-              <a:t>기기 한눈에 제어</a:t>
-            </a:r>
-          </a:p>
-        </p:txBody>
-      </p:sp>
-      <p:sp>
-        <p:nvSpPr>
-          <p:cNvPr id="12" name="Rounded Rectangle 11"/>
-          <p:cNvSpPr/>
-          <p:nvPr/>
-        </p:nvSpPr>
-        <p:spPr>
-          <a:xfrm>
-            <a:off x="5166360" y="3108960"/>
-            <a:ext cx="2377440" cy="2286000"/>
-          </a:xfrm>
-          <a:prstGeom prst="roundRect">
-            <a:avLst/>
-          </a:prstGeom>
-          <a:solidFill>
-            <a:srgbClr val="F3F6FC"/>
-          </a:solidFill>
-          <a:ln w="19050">
-            <a:solidFill>
-              <a:srgbClr val="B9C6DD"/>
-            </a:solidFill>
-          </a:ln>
-          <a:effectLst/>
-        </p:spPr>
-        <p:style>
-          <a:lnRef idx="1">
-            <a:schemeClr val="accent1"/>
-          </a:lnRef>
-          <a:fillRef idx="3">
-            <a:schemeClr val="accent1"/>
-          </a:fillRef>
-          <a:effectRef idx="2">
-            <a:schemeClr val="accent1"/>
-          </a:effectRef>
-          <a:fontRef idx="minor">
-            <a:schemeClr val="lt1"/>
-          </a:fontRef>
-        </p:style>
-        <p:txBody>
-          <a:bodyPr rtlCol="0" anchor="ctr"/>
-          <a:lstStyle/>
-          <a:p>
-            <a:pPr algn="ctr"/>
-          </a:p>
-        </p:txBody>
-      </p:sp>
-      <p:sp>
-        <p:nvSpPr>
-          <p:cNvPr id="13" name="TextBox 12"/>
-          <p:cNvSpPr txBox="1"/>
-          <p:nvPr/>
-        </p:nvSpPr>
-        <p:spPr>
-          <a:xfrm>
-            <a:off x="5166360" y="3657600"/>
-            <a:ext cx="2377440" cy="1280160"/>
-          </a:xfrm>
-          <a:prstGeom prst="rect">
-            <a:avLst/>
-          </a:prstGeom>
-          <a:noFill/>
-        </p:spPr>
-        <p:txBody>
-          <a:bodyPr wrap="square" lIns="0" rIns="0" tIns="0" bIns="0" anchor="ctr">
-            <a:spAutoFit/>
-          </a:bodyPr>
-          <a:lstStyle/>
-          <a:p>
-            <a:pPr algn="ctr">
-              <a:lnSpc>
-                <a:spcPct val="120000"/>
-              </a:lnSpc>
-            </a:pPr>
-            <a:r>
-              <a:rPr sz="2400" b="0">
-                <a:solidFill>
-                  <a:srgbClr val="7F8BA0"/>
-                </a:solidFill>
-                <a:latin typeface="맑은 고딕"/>
-              </a:rPr>
-              <a:t>🌀</a:t>
-            </a:r>
-          </a:p>
-          <a:p>
-            <a:pPr algn="ctr">
-              <a:lnSpc>
-                <a:spcPct val="120000"/>
-              </a:lnSpc>
-            </a:pPr>
-            <a:r>
-              <a:rPr sz="1150" b="1">
-                <a:solidFill>
-                  <a:srgbClr val="48566B"/>
-                </a:solidFill>
-                <a:latin typeface="맑은 고딕"/>
-              </a:rPr>
-              <a:t>팬 + 조명 디밍</a:t>
-            </a:r>
-          </a:p>
-          <a:p>
-            <a:pPr algn="ctr">
-              <a:lnSpc>
-                <a:spcPct val="120000"/>
-              </a:lnSpc>
-            </a:pPr>
-            <a:r>
-              <a:rPr sz="950" b="0">
-                <a:solidFill>
-                  <a:srgbClr val="92A0B5"/>
-                </a:solidFill>
-                <a:latin typeface="맑은 고딕"/>
-              </a:rPr>
-              <a:t>풍속·밝기·색온도</a:t>
-            </a:r>
-          </a:p>
-        </p:txBody>
-      </p:sp>
-      <p:sp>
-        <p:nvSpPr>
-          <p:cNvPr id="14" name="Rounded Rectangle 13"/>
-          <p:cNvSpPr/>
-          <p:nvPr/>
-        </p:nvSpPr>
-        <p:spPr>
-          <a:xfrm>
-            <a:off x="8001000" y="3108960"/>
-            <a:ext cx="2377440" cy="2286000"/>
-          </a:xfrm>
-          <a:prstGeom prst="roundRect">
-            <a:avLst/>
-          </a:prstGeom>
-          <a:solidFill>
-            <a:srgbClr val="F3F6FC"/>
-          </a:solidFill>
-          <a:ln w="19050">
-            <a:solidFill>
-              <a:srgbClr val="B9C6DD"/>
-            </a:solidFill>
-          </a:ln>
-          <a:effectLst/>
-        </p:spPr>
-        <p:style>
-          <a:lnRef idx="1">
-            <a:schemeClr val="accent1"/>
-          </a:lnRef>
-          <a:fillRef idx="3">
-            <a:schemeClr val="accent1"/>
-          </a:fillRef>
-          <a:effectRef idx="2">
-            <a:schemeClr val="accent1"/>
-          </a:effectRef>
-          <a:fontRef idx="minor">
-            <a:schemeClr val="lt1"/>
-          </a:fontRef>
-        </p:style>
-        <p:txBody>
-          <a:bodyPr rtlCol="0" anchor="ctr"/>
-          <a:lstStyle/>
-          <a:p>
-            <a:pPr algn="ctr"/>
-          </a:p>
-        </p:txBody>
-      </p:sp>
-      <p:sp>
-        <p:nvSpPr>
-          <p:cNvPr id="15" name="TextBox 14"/>
-          <p:cNvSpPr txBox="1"/>
-          <p:nvPr/>
-        </p:nvSpPr>
-        <p:spPr>
-          <a:xfrm>
-            <a:off x="8001000" y="3657600"/>
-            <a:ext cx="2377440" cy="1280160"/>
-          </a:xfrm>
-          <a:prstGeom prst="rect">
-            <a:avLst/>
-          </a:prstGeom>
-          <a:noFill/>
-        </p:spPr>
-        <p:txBody>
-          <a:bodyPr wrap="square" lIns="0" rIns="0" tIns="0" bIns="0" anchor="ctr">
-            <a:spAutoFit/>
-          </a:bodyPr>
-          <a:lstStyle/>
-          <a:p>
-            <a:pPr algn="ctr">
-              <a:lnSpc>
-                <a:spcPct val="120000"/>
-              </a:lnSpc>
-            </a:pPr>
-            <a:r>
-              <a:rPr sz="2400" b="0">
-                <a:solidFill>
-                  <a:srgbClr val="7F8BA0"/>
-                </a:solidFill>
-                <a:latin typeface="맑은 고딕"/>
-              </a:rPr>
-              <a:t>🪟</a:t>
-            </a:r>
-          </a:p>
-          <a:p>
-            <a:pPr algn="ctr">
-              <a:lnSpc>
-                <a:spcPct val="120000"/>
-              </a:lnSpc>
-            </a:pPr>
-            <a:r>
-              <a:rPr sz="1150" b="1">
-                <a:solidFill>
-                  <a:srgbClr val="48566B"/>
-                </a:solidFill>
-                <a:latin typeface="맑은 고딕"/>
-              </a:rPr>
-              <a:t>커튼·환기</a:t>
-            </a:r>
-          </a:p>
-          <a:p>
-            <a:pPr algn="ctr">
-              <a:lnSpc>
-                <a:spcPct val="120000"/>
-              </a:lnSpc>
-            </a:pPr>
-            <a:r>
-              <a:rPr sz="950" b="0">
-                <a:solidFill>
-                  <a:srgbClr val="92A0B5"/>
-                </a:solidFill>
-                <a:latin typeface="맑은 고딕"/>
-              </a:rPr>
-              <a:t>전동커튼·전열교환기</a:t>
-            </a:r>
-          </a:p>
-        </p:txBody>
-      </p:sp>
-      <p:sp>
-        <p:nvSpPr>
-          <p:cNvPr id="16" name="Rounded Rectangle 15"/>
-          <p:cNvSpPr/>
-          <p:nvPr/>
-        </p:nvSpPr>
-        <p:spPr>
-          <a:xfrm>
-            <a:off x="640080" y="5577840"/>
-            <a:ext cx="10972800" cy="457200"/>
+            <a:off x="877824" y="2386584"/>
+            <a:ext cx="640080" cy="640080"/>
           </a:xfrm>
           <a:prstGeom prst="roundRect">
             <a:avLst/>
@@ -12907,14 +12504,428 @@
       </p:sp>
       <p:sp>
         <p:nvSpPr>
+          <p:cNvPr id="10" name="TextBox 9"/>
+          <p:cNvSpPr txBox="1"/>
+          <p:nvPr/>
+        </p:nvSpPr>
+        <p:spPr>
+          <a:xfrm>
+            <a:off x="877824" y="2386584"/>
+            <a:ext cx="640080" cy="640080"/>
+          </a:xfrm>
+          <a:prstGeom prst="rect">
+            <a:avLst/>
+          </a:prstGeom>
+          <a:noFill/>
+        </p:spPr>
+        <p:txBody>
+          <a:bodyPr wrap="square" lIns="0" rIns="0" tIns="0" bIns="0" anchor="ctr">
+            <a:spAutoFit/>
+          </a:bodyPr>
+          <a:lstStyle/>
+          <a:p>
+            <a:pPr algn="ctr">
+              <a:lnSpc>
+                <a:spcPct val="100000"/>
+              </a:lnSpc>
+            </a:pPr>
+            <a:r>
+              <a:rPr sz="2100" b="0">
+                <a:solidFill>
+                  <a:srgbClr val="1F6FEB"/>
+                </a:solidFill>
+                <a:latin typeface="맑은 고딕"/>
+              </a:rPr>
+              <a:t>❄️</a:t>
+            </a:r>
+          </a:p>
+        </p:txBody>
+      </p:sp>
+      <p:sp>
+        <p:nvSpPr>
+          <p:cNvPr id="11" name="TextBox 10"/>
+          <p:cNvSpPr txBox="1"/>
+          <p:nvPr/>
+        </p:nvSpPr>
+        <p:spPr>
+          <a:xfrm>
+            <a:off x="1682495" y="2478024"/>
+            <a:ext cx="2249424" cy="457200"/>
+          </a:xfrm>
+          <a:prstGeom prst="rect">
+            <a:avLst/>
+          </a:prstGeom>
+          <a:noFill/>
+        </p:spPr>
+        <p:txBody>
+          <a:bodyPr wrap="square" lIns="0" rIns="0" tIns="0" bIns="0" anchor="t">
+            <a:spAutoFit/>
+          </a:bodyPr>
+          <a:lstStyle/>
+          <a:p>
+            <a:pPr algn="l">
+              <a:lnSpc>
+                <a:spcPct val="100000"/>
+              </a:lnSpc>
+            </a:pPr>
+            <a:r>
+              <a:rPr sz="1500" b="1">
+                <a:solidFill>
+                  <a:srgbClr val="1A2230"/>
+                </a:solidFill>
+                <a:latin typeface="맑은 고딕"/>
+              </a:rPr>
+              <a:t>에어컨</a:t>
+            </a:r>
+          </a:p>
+        </p:txBody>
+      </p:sp>
+      <p:sp>
+        <p:nvSpPr>
+          <p:cNvPr id="12" name="TextBox 11"/>
+          <p:cNvSpPr txBox="1"/>
+          <p:nvPr/>
+        </p:nvSpPr>
+        <p:spPr>
+          <a:xfrm>
+            <a:off x="1682495" y="2990088"/>
+            <a:ext cx="2249424" cy="868680"/>
+          </a:xfrm>
+          <a:prstGeom prst="rect">
+            <a:avLst/>
+          </a:prstGeom>
+          <a:noFill/>
+        </p:spPr>
+        <p:txBody>
+          <a:bodyPr wrap="square" lIns="0" rIns="0" tIns="0" bIns="0" anchor="t">
+            <a:spAutoFit/>
+          </a:bodyPr>
+          <a:lstStyle/>
+          <a:p>
+            <a:pPr algn="l">
+              <a:lnSpc>
+                <a:spcPct val="115000"/>
+              </a:lnSpc>
+            </a:pPr>
+            <a:r>
+              <a:rPr sz="1080" b="0">
+                <a:solidFill>
+                  <a:srgbClr val="5B6678"/>
+                </a:solidFill>
+                <a:latin typeface="맑은 고딕"/>
+              </a:rPr>
+              <a:t>시스템·벽걸이 에어컨 설치·공동구매</a:t>
+            </a:r>
+          </a:p>
+        </p:txBody>
+      </p:sp>
+      <p:sp>
+        <p:nvSpPr>
+          <p:cNvPr id="13" name="Rounded Rectangle 12"/>
+          <p:cNvSpPr/>
+          <p:nvPr/>
+        </p:nvSpPr>
+        <p:spPr>
+          <a:xfrm>
+            <a:off x="4389120" y="2148840"/>
+            <a:ext cx="3474720" cy="1828800"/>
+          </a:xfrm>
+          <a:prstGeom prst="roundRect">
+            <a:avLst/>
+          </a:prstGeom>
+          <a:solidFill>
+            <a:srgbClr val="FFFFFF"/>
+          </a:solidFill>
+          <a:ln w="12700">
+            <a:solidFill>
+              <a:srgbClr val="E3E8F0"/>
+            </a:solidFill>
+          </a:ln>
+          <a:effectLst/>
+        </p:spPr>
+        <p:style>
+          <a:lnRef idx="1">
+            <a:schemeClr val="accent1"/>
+          </a:lnRef>
+          <a:fillRef idx="3">
+            <a:schemeClr val="accent1"/>
+          </a:fillRef>
+          <a:effectRef idx="2">
+            <a:schemeClr val="accent1"/>
+          </a:effectRef>
+          <a:fontRef idx="minor">
+            <a:schemeClr val="lt1"/>
+          </a:fontRef>
+        </p:style>
+        <p:txBody>
+          <a:bodyPr rtlCol="0" anchor="ctr"/>
+          <a:lstStyle/>
+          <a:p>
+            <a:pPr algn="ctr"/>
+          </a:p>
+        </p:txBody>
+      </p:sp>
+      <p:sp>
+        <p:nvSpPr>
+          <p:cNvPr id="14" name="Rounded Rectangle 13"/>
+          <p:cNvSpPr/>
+          <p:nvPr/>
+        </p:nvSpPr>
+        <p:spPr>
+          <a:xfrm>
+            <a:off x="4626864" y="2386584"/>
+            <a:ext cx="640080" cy="640080"/>
+          </a:xfrm>
+          <a:prstGeom prst="roundRect">
+            <a:avLst/>
+          </a:prstGeom>
+          <a:solidFill>
+            <a:srgbClr val="EEF3FB"/>
+          </a:solidFill>
+          <a:ln>
+            <a:noFill/>
+          </a:ln>
+          <a:effectLst/>
+        </p:spPr>
+        <p:style>
+          <a:lnRef idx="1">
+            <a:schemeClr val="accent1"/>
+          </a:lnRef>
+          <a:fillRef idx="3">
+            <a:schemeClr val="accent1"/>
+          </a:fillRef>
+          <a:effectRef idx="2">
+            <a:schemeClr val="accent1"/>
+          </a:effectRef>
+          <a:fontRef idx="minor">
+            <a:schemeClr val="lt1"/>
+          </a:fontRef>
+        </p:style>
+        <p:txBody>
+          <a:bodyPr rtlCol="0" anchor="ctr"/>
+          <a:lstStyle/>
+          <a:p>
+            <a:pPr algn="ctr"/>
+          </a:p>
+        </p:txBody>
+      </p:sp>
+      <p:sp>
+        <p:nvSpPr>
+          <p:cNvPr id="15" name="TextBox 14"/>
+          <p:cNvSpPr txBox="1"/>
+          <p:nvPr/>
+        </p:nvSpPr>
+        <p:spPr>
+          <a:xfrm>
+            <a:off x="4626864" y="2386584"/>
+            <a:ext cx="640080" cy="640080"/>
+          </a:xfrm>
+          <a:prstGeom prst="rect">
+            <a:avLst/>
+          </a:prstGeom>
+          <a:noFill/>
+        </p:spPr>
+        <p:txBody>
+          <a:bodyPr wrap="square" lIns="0" rIns="0" tIns="0" bIns="0" anchor="ctr">
+            <a:spAutoFit/>
+          </a:bodyPr>
+          <a:lstStyle/>
+          <a:p>
+            <a:pPr algn="ctr">
+              <a:lnSpc>
+                <a:spcPct val="100000"/>
+              </a:lnSpc>
+            </a:pPr>
+            <a:r>
+              <a:rPr sz="2100" b="0">
+                <a:solidFill>
+                  <a:srgbClr val="1F6FEB"/>
+                </a:solidFill>
+                <a:latin typeface="맑은 고딕"/>
+              </a:rPr>
+              <a:t>🚪</a:t>
+            </a:r>
+          </a:p>
+        </p:txBody>
+      </p:sp>
+      <p:sp>
+        <p:nvSpPr>
+          <p:cNvPr id="16" name="TextBox 15"/>
+          <p:cNvSpPr txBox="1"/>
+          <p:nvPr/>
+        </p:nvSpPr>
+        <p:spPr>
+          <a:xfrm>
+            <a:off x="5431536" y="2478024"/>
+            <a:ext cx="2249424" cy="457200"/>
+          </a:xfrm>
+          <a:prstGeom prst="rect">
+            <a:avLst/>
+          </a:prstGeom>
+          <a:noFill/>
+        </p:spPr>
+        <p:txBody>
+          <a:bodyPr wrap="square" lIns="0" rIns="0" tIns="0" bIns="0" anchor="t">
+            <a:spAutoFit/>
+          </a:bodyPr>
+          <a:lstStyle/>
+          <a:p>
+            <a:pPr algn="l">
+              <a:lnSpc>
+                <a:spcPct val="100000"/>
+              </a:lnSpc>
+            </a:pPr>
+            <a:r>
+              <a:rPr sz="1500" b="1">
+                <a:solidFill>
+                  <a:srgbClr val="1A2230"/>
+                </a:solidFill>
+                <a:latin typeface="맑은 고딕"/>
+              </a:rPr>
+              <a:t>중문</a:t>
+            </a:r>
+          </a:p>
+        </p:txBody>
+      </p:sp>
+      <p:sp>
+        <p:nvSpPr>
           <p:cNvPr id="17" name="TextBox 16"/>
           <p:cNvSpPr txBox="1"/>
           <p:nvPr/>
         </p:nvSpPr>
         <p:spPr>
           <a:xfrm>
-            <a:off x="804671" y="5687568"/>
-            <a:ext cx="10643616" cy="237744"/>
+            <a:off x="5431536" y="2990088"/>
+            <a:ext cx="2249424" cy="868680"/>
+          </a:xfrm>
+          <a:prstGeom prst="rect">
+            <a:avLst/>
+          </a:prstGeom>
+          <a:noFill/>
+        </p:spPr>
+        <p:txBody>
+          <a:bodyPr wrap="square" lIns="0" rIns="0" tIns="0" bIns="0" anchor="t">
+            <a:spAutoFit/>
+          </a:bodyPr>
+          <a:lstStyle/>
+          <a:p>
+            <a:pPr algn="l">
+              <a:lnSpc>
+                <a:spcPct val="115000"/>
+              </a:lnSpc>
+            </a:pPr>
+            <a:r>
+              <a:rPr sz="1080" b="0">
+                <a:solidFill>
+                  <a:srgbClr val="5B6678"/>
+                </a:solidFill>
+                <a:latin typeface="맑은 고딕"/>
+              </a:rPr>
+              <a:t>현관 중문 — 단열·소음·먼지 차단, 디자인 선택</a:t>
+            </a:r>
+          </a:p>
+        </p:txBody>
+      </p:sp>
+      <p:sp>
+        <p:nvSpPr>
+          <p:cNvPr id="18" name="Rounded Rectangle 17"/>
+          <p:cNvSpPr/>
+          <p:nvPr/>
+        </p:nvSpPr>
+        <p:spPr>
+          <a:xfrm>
+            <a:off x="8138159" y="2148840"/>
+            <a:ext cx="3474720" cy="1828800"/>
+          </a:xfrm>
+          <a:prstGeom prst="roundRect">
+            <a:avLst/>
+          </a:prstGeom>
+          <a:solidFill>
+            <a:srgbClr val="FFFFFF"/>
+          </a:solidFill>
+          <a:ln w="12700">
+            <a:solidFill>
+              <a:srgbClr val="E3E8F0"/>
+            </a:solidFill>
+          </a:ln>
+          <a:effectLst/>
+        </p:spPr>
+        <p:style>
+          <a:lnRef idx="1">
+            <a:schemeClr val="accent1"/>
+          </a:lnRef>
+          <a:fillRef idx="3">
+            <a:schemeClr val="accent1"/>
+          </a:fillRef>
+          <a:effectRef idx="2">
+            <a:schemeClr val="accent1"/>
+          </a:effectRef>
+          <a:fontRef idx="minor">
+            <a:schemeClr val="lt1"/>
+          </a:fontRef>
+        </p:style>
+        <p:txBody>
+          <a:bodyPr rtlCol="0" anchor="ctr"/>
+          <a:lstStyle/>
+          <a:p>
+            <a:pPr algn="ctr"/>
+          </a:p>
+        </p:txBody>
+      </p:sp>
+      <p:sp>
+        <p:nvSpPr>
+          <p:cNvPr id="19" name="Rounded Rectangle 18"/>
+          <p:cNvSpPr/>
+          <p:nvPr/>
+        </p:nvSpPr>
+        <p:spPr>
+          <a:xfrm>
+            <a:off x="8375903" y="2386584"/>
+            <a:ext cx="640080" cy="640080"/>
+          </a:xfrm>
+          <a:prstGeom prst="roundRect">
+            <a:avLst/>
+          </a:prstGeom>
+          <a:solidFill>
+            <a:srgbClr val="EEF3FB"/>
+          </a:solidFill>
+          <a:ln>
+            <a:noFill/>
+          </a:ln>
+          <a:effectLst/>
+        </p:spPr>
+        <p:style>
+          <a:lnRef idx="1">
+            <a:schemeClr val="accent1"/>
+          </a:lnRef>
+          <a:fillRef idx="3">
+            <a:schemeClr val="accent1"/>
+          </a:fillRef>
+          <a:effectRef idx="2">
+            <a:schemeClr val="accent1"/>
+          </a:effectRef>
+          <a:fontRef idx="minor">
+            <a:schemeClr val="lt1"/>
+          </a:fontRef>
+        </p:style>
+        <p:txBody>
+          <a:bodyPr rtlCol="0" anchor="ctr"/>
+          <a:lstStyle/>
+          <a:p>
+            <a:pPr algn="ctr"/>
+          </a:p>
+        </p:txBody>
+      </p:sp>
+      <p:sp>
+        <p:nvSpPr>
+          <p:cNvPr id="20" name="TextBox 19"/>
+          <p:cNvSpPr txBox="1"/>
+          <p:nvPr/>
+        </p:nvSpPr>
+        <p:spPr>
+          <a:xfrm>
+            <a:off x="8375903" y="2386584"/>
+            <a:ext cx="640080" cy="640080"/>
           </a:xfrm>
           <a:prstGeom prst="rect">
             <a:avLst/>
@@ -12927,8 +12938,790 @@
           </a:bodyPr>
           <a:lstStyle/>
           <a:p>
+            <a:pPr algn="ctr">
+              <a:lnSpc>
+                <a:spcPct val="100000"/>
+              </a:lnSpc>
+            </a:pPr>
+            <a:r>
+              <a:rPr sz="2100" b="0">
+                <a:solidFill>
+                  <a:srgbClr val="1F6FEB"/>
+                </a:solidFill>
+                <a:latin typeface="맑은 고딕"/>
+              </a:rPr>
+              <a:t>🎨</a:t>
+            </a:r>
+          </a:p>
+        </p:txBody>
+      </p:sp>
+      <p:sp>
+        <p:nvSpPr>
+          <p:cNvPr id="21" name="TextBox 20"/>
+          <p:cNvSpPr txBox="1"/>
+          <p:nvPr/>
+        </p:nvSpPr>
+        <p:spPr>
+          <a:xfrm>
+            <a:off x="9180576" y="2478024"/>
+            <a:ext cx="2249424" cy="457200"/>
+          </a:xfrm>
+          <a:prstGeom prst="rect">
+            <a:avLst/>
+          </a:prstGeom>
+          <a:noFill/>
+        </p:spPr>
+        <p:txBody>
+          <a:bodyPr wrap="square" lIns="0" rIns="0" tIns="0" bIns="0" anchor="t">
+            <a:spAutoFit/>
+          </a:bodyPr>
+          <a:lstStyle/>
+          <a:p>
             <a:pPr algn="l">
               <a:lnSpc>
+                <a:spcPct val="100000"/>
+              </a:lnSpc>
+            </a:pPr>
+            <a:r>
+              <a:rPr sz="1500" b="1">
+                <a:solidFill>
+                  <a:srgbClr val="1A2230"/>
+                </a:solidFill>
+                <a:latin typeface="맑은 고딕"/>
+              </a:rPr>
+              <a:t>친환경 도료</a:t>
+            </a:r>
+          </a:p>
+        </p:txBody>
+      </p:sp>
+      <p:sp>
+        <p:nvSpPr>
+          <p:cNvPr id="22" name="TextBox 21"/>
+          <p:cNvSpPr txBox="1"/>
+          <p:nvPr/>
+        </p:nvSpPr>
+        <p:spPr>
+          <a:xfrm>
+            <a:off x="9180576" y="2990088"/>
+            <a:ext cx="2249424" cy="868680"/>
+          </a:xfrm>
+          <a:prstGeom prst="rect">
+            <a:avLst/>
+          </a:prstGeom>
+          <a:noFill/>
+        </p:spPr>
+        <p:txBody>
+          <a:bodyPr wrap="square" lIns="0" rIns="0" tIns="0" bIns="0" anchor="t">
+            <a:spAutoFit/>
+          </a:bodyPr>
+          <a:lstStyle/>
+          <a:p>
+            <a:pPr algn="l">
+              <a:lnSpc>
+                <a:spcPct val="115000"/>
+              </a:lnSpc>
+            </a:pPr>
+            <a:r>
+              <a:rPr sz="1080" b="0">
+                <a:solidFill>
+                  <a:srgbClr val="5B6678"/>
+                </a:solidFill>
+                <a:latin typeface="맑은 고딕"/>
+              </a:rPr>
+              <a:t>무독성 친환경 도장 — 새집증후군 저감</a:t>
+            </a:r>
+          </a:p>
+        </p:txBody>
+      </p:sp>
+      <p:sp>
+        <p:nvSpPr>
+          <p:cNvPr id="23" name="Rounded Rectangle 22"/>
+          <p:cNvSpPr/>
+          <p:nvPr/>
+        </p:nvSpPr>
+        <p:spPr>
+          <a:xfrm>
+            <a:off x="640080" y="4270248"/>
+            <a:ext cx="3474720" cy="1828800"/>
+          </a:xfrm>
+          <a:prstGeom prst="roundRect">
+            <a:avLst/>
+          </a:prstGeom>
+          <a:solidFill>
+            <a:srgbClr val="FFFFFF"/>
+          </a:solidFill>
+          <a:ln w="12700">
+            <a:solidFill>
+              <a:srgbClr val="E3E8F0"/>
+            </a:solidFill>
+          </a:ln>
+          <a:effectLst/>
+        </p:spPr>
+        <p:style>
+          <a:lnRef idx="1">
+            <a:schemeClr val="accent1"/>
+          </a:lnRef>
+          <a:fillRef idx="3">
+            <a:schemeClr val="accent1"/>
+          </a:fillRef>
+          <a:effectRef idx="2">
+            <a:schemeClr val="accent1"/>
+          </a:effectRef>
+          <a:fontRef idx="minor">
+            <a:schemeClr val="lt1"/>
+          </a:fontRef>
+        </p:style>
+        <p:txBody>
+          <a:bodyPr rtlCol="0" anchor="ctr"/>
+          <a:lstStyle/>
+          <a:p>
+            <a:pPr algn="ctr"/>
+          </a:p>
+        </p:txBody>
+      </p:sp>
+      <p:sp>
+        <p:nvSpPr>
+          <p:cNvPr id="24" name="Rounded Rectangle 23"/>
+          <p:cNvSpPr/>
+          <p:nvPr/>
+        </p:nvSpPr>
+        <p:spPr>
+          <a:xfrm>
+            <a:off x="877824" y="4507992"/>
+            <a:ext cx="640080" cy="640080"/>
+          </a:xfrm>
+          <a:prstGeom prst="roundRect">
+            <a:avLst/>
+          </a:prstGeom>
+          <a:solidFill>
+            <a:srgbClr val="EEF3FB"/>
+          </a:solidFill>
+          <a:ln>
+            <a:noFill/>
+          </a:ln>
+          <a:effectLst/>
+        </p:spPr>
+        <p:style>
+          <a:lnRef idx="1">
+            <a:schemeClr val="accent1"/>
+          </a:lnRef>
+          <a:fillRef idx="3">
+            <a:schemeClr val="accent1"/>
+          </a:fillRef>
+          <a:effectRef idx="2">
+            <a:schemeClr val="accent1"/>
+          </a:effectRef>
+          <a:fontRef idx="minor">
+            <a:schemeClr val="lt1"/>
+          </a:fontRef>
+        </p:style>
+        <p:txBody>
+          <a:bodyPr rtlCol="0" anchor="ctr"/>
+          <a:lstStyle/>
+          <a:p>
+            <a:pPr algn="ctr"/>
+          </a:p>
+        </p:txBody>
+      </p:sp>
+      <p:sp>
+        <p:nvSpPr>
+          <p:cNvPr id="25" name="TextBox 24"/>
+          <p:cNvSpPr txBox="1"/>
+          <p:nvPr/>
+        </p:nvSpPr>
+        <p:spPr>
+          <a:xfrm>
+            <a:off x="877824" y="4507992"/>
+            <a:ext cx="640080" cy="640080"/>
+          </a:xfrm>
+          <a:prstGeom prst="rect">
+            <a:avLst/>
+          </a:prstGeom>
+          <a:noFill/>
+        </p:spPr>
+        <p:txBody>
+          <a:bodyPr wrap="square" lIns="0" rIns="0" tIns="0" bIns="0" anchor="ctr">
+            <a:spAutoFit/>
+          </a:bodyPr>
+          <a:lstStyle/>
+          <a:p>
+            <a:pPr algn="ctr">
+              <a:lnSpc>
+                <a:spcPct val="100000"/>
+              </a:lnSpc>
+            </a:pPr>
+            <a:r>
+              <a:rPr sz="2100" b="0">
+                <a:solidFill>
+                  <a:srgbClr val="1F6FEB"/>
+                </a:solidFill>
+                <a:latin typeface="맑은 고딕"/>
+              </a:rPr>
+              <a:t>🌬️</a:t>
+            </a:r>
+          </a:p>
+        </p:txBody>
+      </p:sp>
+      <p:sp>
+        <p:nvSpPr>
+          <p:cNvPr id="26" name="TextBox 25"/>
+          <p:cNvSpPr txBox="1"/>
+          <p:nvPr/>
+        </p:nvSpPr>
+        <p:spPr>
+          <a:xfrm>
+            <a:off x="1682495" y="4599432"/>
+            <a:ext cx="2249424" cy="457200"/>
+          </a:xfrm>
+          <a:prstGeom prst="rect">
+            <a:avLst/>
+          </a:prstGeom>
+          <a:noFill/>
+        </p:spPr>
+        <p:txBody>
+          <a:bodyPr wrap="square" lIns="0" rIns="0" tIns="0" bIns="0" anchor="t">
+            <a:spAutoFit/>
+          </a:bodyPr>
+          <a:lstStyle/>
+          <a:p>
+            <a:pPr algn="l">
+              <a:lnSpc>
+                <a:spcPct val="100000"/>
+              </a:lnSpc>
+            </a:pPr>
+            <a:r>
+              <a:rPr sz="1500" b="1">
+                <a:solidFill>
+                  <a:srgbClr val="1A2230"/>
+                </a:solidFill>
+                <a:latin typeface="맑은 고딕"/>
+              </a:rPr>
+              <a:t>환기 시스템</a:t>
+            </a:r>
+          </a:p>
+        </p:txBody>
+      </p:sp>
+      <p:sp>
+        <p:nvSpPr>
+          <p:cNvPr id="27" name="TextBox 26"/>
+          <p:cNvSpPr txBox="1"/>
+          <p:nvPr/>
+        </p:nvSpPr>
+        <p:spPr>
+          <a:xfrm>
+            <a:off x="1682495" y="5111496"/>
+            <a:ext cx="2249424" cy="868680"/>
+          </a:xfrm>
+          <a:prstGeom prst="rect">
+            <a:avLst/>
+          </a:prstGeom>
+          <a:noFill/>
+        </p:spPr>
+        <p:txBody>
+          <a:bodyPr wrap="square" lIns="0" rIns="0" tIns="0" bIns="0" anchor="t">
+            <a:spAutoFit/>
+          </a:bodyPr>
+          <a:lstStyle/>
+          <a:p>
+            <a:pPr algn="l">
+              <a:lnSpc>
+                <a:spcPct val="115000"/>
+              </a:lnSpc>
+            </a:pPr>
+            <a:r>
+              <a:rPr sz="1080" b="0">
+                <a:solidFill>
+                  <a:srgbClr val="5B6678"/>
+                </a:solidFill>
+                <a:latin typeface="맑은 고딕"/>
+              </a:rPr>
+              <a:t>전열교환 환기로 실내 공기질 상시 관리</a:t>
+            </a:r>
+          </a:p>
+        </p:txBody>
+      </p:sp>
+      <p:sp>
+        <p:nvSpPr>
+          <p:cNvPr id="28" name="Rounded Rectangle 27"/>
+          <p:cNvSpPr/>
+          <p:nvPr/>
+        </p:nvSpPr>
+        <p:spPr>
+          <a:xfrm>
+            <a:off x="4389120" y="4270248"/>
+            <a:ext cx="3474720" cy="1828800"/>
+          </a:xfrm>
+          <a:prstGeom prst="roundRect">
+            <a:avLst/>
+          </a:prstGeom>
+          <a:solidFill>
+            <a:srgbClr val="FFFFFF"/>
+          </a:solidFill>
+          <a:ln w="12700">
+            <a:solidFill>
+              <a:srgbClr val="E3E8F0"/>
+            </a:solidFill>
+          </a:ln>
+          <a:effectLst/>
+        </p:spPr>
+        <p:style>
+          <a:lnRef idx="1">
+            <a:schemeClr val="accent1"/>
+          </a:lnRef>
+          <a:fillRef idx="3">
+            <a:schemeClr val="accent1"/>
+          </a:fillRef>
+          <a:effectRef idx="2">
+            <a:schemeClr val="accent1"/>
+          </a:effectRef>
+          <a:fontRef idx="minor">
+            <a:schemeClr val="lt1"/>
+          </a:fontRef>
+        </p:style>
+        <p:txBody>
+          <a:bodyPr rtlCol="0" anchor="ctr"/>
+          <a:lstStyle/>
+          <a:p>
+            <a:pPr algn="ctr"/>
+          </a:p>
+        </p:txBody>
+      </p:sp>
+      <p:sp>
+        <p:nvSpPr>
+          <p:cNvPr id="29" name="Rounded Rectangle 28"/>
+          <p:cNvSpPr/>
+          <p:nvPr/>
+        </p:nvSpPr>
+        <p:spPr>
+          <a:xfrm>
+            <a:off x="4626864" y="4507992"/>
+            <a:ext cx="640080" cy="640080"/>
+          </a:xfrm>
+          <a:prstGeom prst="roundRect">
+            <a:avLst/>
+          </a:prstGeom>
+          <a:solidFill>
+            <a:srgbClr val="EEF3FB"/>
+          </a:solidFill>
+          <a:ln>
+            <a:noFill/>
+          </a:ln>
+          <a:effectLst/>
+        </p:spPr>
+        <p:style>
+          <a:lnRef idx="1">
+            <a:schemeClr val="accent1"/>
+          </a:lnRef>
+          <a:fillRef idx="3">
+            <a:schemeClr val="accent1"/>
+          </a:fillRef>
+          <a:effectRef idx="2">
+            <a:schemeClr val="accent1"/>
+          </a:effectRef>
+          <a:fontRef idx="minor">
+            <a:schemeClr val="lt1"/>
+          </a:fontRef>
+        </p:style>
+        <p:txBody>
+          <a:bodyPr rtlCol="0" anchor="ctr"/>
+          <a:lstStyle/>
+          <a:p>
+            <a:pPr algn="ctr"/>
+          </a:p>
+        </p:txBody>
+      </p:sp>
+      <p:sp>
+        <p:nvSpPr>
+          <p:cNvPr id="30" name="TextBox 29"/>
+          <p:cNvSpPr txBox="1"/>
+          <p:nvPr/>
+        </p:nvSpPr>
+        <p:spPr>
+          <a:xfrm>
+            <a:off x="4626864" y="4507992"/>
+            <a:ext cx="640080" cy="640080"/>
+          </a:xfrm>
+          <a:prstGeom prst="rect">
+            <a:avLst/>
+          </a:prstGeom>
+          <a:noFill/>
+        </p:spPr>
+        <p:txBody>
+          <a:bodyPr wrap="square" lIns="0" rIns="0" tIns="0" bIns="0" anchor="ctr">
+            <a:spAutoFit/>
+          </a:bodyPr>
+          <a:lstStyle/>
+          <a:p>
+            <a:pPr algn="ctr">
+              <a:lnSpc>
+                <a:spcPct val="100000"/>
+              </a:lnSpc>
+            </a:pPr>
+            <a:r>
+              <a:rPr sz="2100" b="0">
+                <a:solidFill>
+                  <a:srgbClr val="1F6FEB"/>
+                </a:solidFill>
+                <a:latin typeface="맑은 고딕"/>
+              </a:rPr>
+              <a:t>♻️</a:t>
+            </a:r>
+          </a:p>
+        </p:txBody>
+      </p:sp>
+      <p:sp>
+        <p:nvSpPr>
+          <p:cNvPr id="31" name="TextBox 30"/>
+          <p:cNvSpPr txBox="1"/>
+          <p:nvPr/>
+        </p:nvSpPr>
+        <p:spPr>
+          <a:xfrm>
+            <a:off x="5431536" y="4599432"/>
+            <a:ext cx="2249424" cy="457200"/>
+          </a:xfrm>
+          <a:prstGeom prst="rect">
+            <a:avLst/>
+          </a:prstGeom>
+          <a:noFill/>
+        </p:spPr>
+        <p:txBody>
+          <a:bodyPr wrap="square" lIns="0" rIns="0" tIns="0" bIns="0" anchor="t">
+            <a:spAutoFit/>
+          </a:bodyPr>
+          <a:lstStyle/>
+          <a:p>
+            <a:pPr algn="l">
+              <a:lnSpc>
+                <a:spcPct val="100000"/>
+              </a:lnSpc>
+            </a:pPr>
+            <a:r>
+              <a:rPr sz="1500" b="1">
+                <a:solidFill>
+                  <a:srgbClr val="1A2230"/>
+                </a:solidFill>
+                <a:latin typeface="맑은 고딕"/>
+              </a:rPr>
+              <a:t>음식물 처리기</a:t>
+            </a:r>
+          </a:p>
+        </p:txBody>
+      </p:sp>
+      <p:sp>
+        <p:nvSpPr>
+          <p:cNvPr id="32" name="TextBox 31"/>
+          <p:cNvSpPr txBox="1"/>
+          <p:nvPr/>
+        </p:nvSpPr>
+        <p:spPr>
+          <a:xfrm>
+            <a:off x="5431536" y="5111496"/>
+            <a:ext cx="2249424" cy="868680"/>
+          </a:xfrm>
+          <a:prstGeom prst="rect">
+            <a:avLst/>
+          </a:prstGeom>
+          <a:noFill/>
+        </p:spPr>
+        <p:txBody>
+          <a:bodyPr wrap="square" lIns="0" rIns="0" tIns="0" bIns="0" anchor="t">
+            <a:spAutoFit/>
+          </a:bodyPr>
+          <a:lstStyle/>
+          <a:p>
+            <a:pPr algn="l">
+              <a:lnSpc>
+                <a:spcPct val="115000"/>
+              </a:lnSpc>
+            </a:pPr>
+            <a:r>
+              <a:rPr sz="1080" b="0">
+                <a:solidFill>
+                  <a:srgbClr val="5B6678"/>
+                </a:solidFill>
+                <a:latin typeface="맑은 고딕"/>
+              </a:rPr>
+              <a:t>싱크대 음식물 분쇄·건조 처리</a:t>
+            </a:r>
+          </a:p>
+        </p:txBody>
+      </p:sp>
+      <p:sp>
+        <p:nvSpPr>
+          <p:cNvPr id="33" name="Rounded Rectangle 32"/>
+          <p:cNvSpPr/>
+          <p:nvPr/>
+        </p:nvSpPr>
+        <p:spPr>
+          <a:xfrm>
+            <a:off x="8138159" y="4270248"/>
+            <a:ext cx="3474720" cy="1828800"/>
+          </a:xfrm>
+          <a:prstGeom prst="roundRect">
+            <a:avLst/>
+          </a:prstGeom>
+          <a:solidFill>
+            <a:srgbClr val="FFFFFF"/>
+          </a:solidFill>
+          <a:ln w="12700">
+            <a:solidFill>
+              <a:srgbClr val="E3E8F0"/>
+            </a:solidFill>
+          </a:ln>
+          <a:effectLst/>
+        </p:spPr>
+        <p:style>
+          <a:lnRef idx="1">
+            <a:schemeClr val="accent1"/>
+          </a:lnRef>
+          <a:fillRef idx="3">
+            <a:schemeClr val="accent1"/>
+          </a:fillRef>
+          <a:effectRef idx="2">
+            <a:schemeClr val="accent1"/>
+          </a:effectRef>
+          <a:fontRef idx="minor">
+            <a:schemeClr val="lt1"/>
+          </a:fontRef>
+        </p:style>
+        <p:txBody>
+          <a:bodyPr rtlCol="0" anchor="ctr"/>
+          <a:lstStyle/>
+          <a:p>
+            <a:pPr algn="ctr"/>
+          </a:p>
+        </p:txBody>
+      </p:sp>
+      <p:sp>
+        <p:nvSpPr>
+          <p:cNvPr id="34" name="Rounded Rectangle 33"/>
+          <p:cNvSpPr/>
+          <p:nvPr/>
+        </p:nvSpPr>
+        <p:spPr>
+          <a:xfrm>
+            <a:off x="8375903" y="4507992"/>
+            <a:ext cx="640080" cy="640080"/>
+          </a:xfrm>
+          <a:prstGeom prst="roundRect">
+            <a:avLst/>
+          </a:prstGeom>
+          <a:solidFill>
+            <a:srgbClr val="EEF3FB"/>
+          </a:solidFill>
+          <a:ln>
+            <a:noFill/>
+          </a:ln>
+          <a:effectLst/>
+        </p:spPr>
+        <p:style>
+          <a:lnRef idx="1">
+            <a:schemeClr val="accent1"/>
+          </a:lnRef>
+          <a:fillRef idx="3">
+            <a:schemeClr val="accent1"/>
+          </a:fillRef>
+          <a:effectRef idx="2">
+            <a:schemeClr val="accent1"/>
+          </a:effectRef>
+          <a:fontRef idx="minor">
+            <a:schemeClr val="lt1"/>
+          </a:fontRef>
+        </p:style>
+        <p:txBody>
+          <a:bodyPr rtlCol="0" anchor="ctr"/>
+          <a:lstStyle/>
+          <a:p>
+            <a:pPr algn="ctr"/>
+          </a:p>
+        </p:txBody>
+      </p:sp>
+      <p:sp>
+        <p:nvSpPr>
+          <p:cNvPr id="35" name="TextBox 34"/>
+          <p:cNvSpPr txBox="1"/>
+          <p:nvPr/>
+        </p:nvSpPr>
+        <p:spPr>
+          <a:xfrm>
+            <a:off x="8375903" y="4507992"/>
+            <a:ext cx="640080" cy="640080"/>
+          </a:xfrm>
+          <a:prstGeom prst="rect">
+            <a:avLst/>
+          </a:prstGeom>
+          <a:noFill/>
+        </p:spPr>
+        <p:txBody>
+          <a:bodyPr wrap="square" lIns="0" rIns="0" tIns="0" bIns="0" anchor="ctr">
+            <a:spAutoFit/>
+          </a:bodyPr>
+          <a:lstStyle/>
+          <a:p>
+            <a:pPr algn="ctr">
+              <a:lnSpc>
+                <a:spcPct val="100000"/>
+              </a:lnSpc>
+            </a:pPr>
+            <a:r>
+              <a:rPr sz="2100" b="0">
+                <a:solidFill>
+                  <a:srgbClr val="1F6FEB"/>
+                </a:solidFill>
+                <a:latin typeface="맑은 고딕"/>
+              </a:rPr>
+              <a:t>➕</a:t>
+            </a:r>
+          </a:p>
+        </p:txBody>
+      </p:sp>
+      <p:sp>
+        <p:nvSpPr>
+          <p:cNvPr id="36" name="TextBox 35"/>
+          <p:cNvSpPr txBox="1"/>
+          <p:nvPr/>
+        </p:nvSpPr>
+        <p:spPr>
+          <a:xfrm>
+            <a:off x="9180576" y="4599432"/>
+            <a:ext cx="2249424" cy="457200"/>
+          </a:xfrm>
+          <a:prstGeom prst="rect">
+            <a:avLst/>
+          </a:prstGeom>
+          <a:noFill/>
+        </p:spPr>
+        <p:txBody>
+          <a:bodyPr wrap="square" lIns="0" rIns="0" tIns="0" bIns="0" anchor="t">
+            <a:spAutoFit/>
+          </a:bodyPr>
+          <a:lstStyle/>
+          <a:p>
+            <a:pPr algn="l">
+              <a:lnSpc>
+                <a:spcPct val="100000"/>
+              </a:lnSpc>
+            </a:pPr>
+            <a:r>
+              <a:rPr sz="1500" b="1">
+                <a:solidFill>
+                  <a:srgbClr val="1A2230"/>
+                </a:solidFill>
+                <a:latin typeface="맑은 고딕"/>
+              </a:rPr>
+              <a:t>기타 옵션</a:t>
+            </a:r>
+          </a:p>
+        </p:txBody>
+      </p:sp>
+      <p:sp>
+        <p:nvSpPr>
+          <p:cNvPr id="37" name="TextBox 36"/>
+          <p:cNvSpPr txBox="1"/>
+          <p:nvPr/>
+        </p:nvSpPr>
+        <p:spPr>
+          <a:xfrm>
+            <a:off x="9180576" y="5111496"/>
+            <a:ext cx="2249424" cy="868680"/>
+          </a:xfrm>
+          <a:prstGeom prst="rect">
+            <a:avLst/>
+          </a:prstGeom>
+          <a:noFill/>
+        </p:spPr>
+        <p:txBody>
+          <a:bodyPr wrap="square" lIns="0" rIns="0" tIns="0" bIns="0" anchor="t">
+            <a:spAutoFit/>
+          </a:bodyPr>
+          <a:lstStyle/>
+          <a:p>
+            <a:pPr algn="l">
+              <a:lnSpc>
+                <a:spcPct val="115000"/>
+              </a:lnSpc>
+            </a:pPr>
+            <a:r>
+              <a:rPr sz="1080" b="0">
+                <a:solidFill>
+                  <a:srgbClr val="5B6678"/>
+                </a:solidFill>
+                <a:latin typeface="맑은 고딕"/>
+              </a:rPr>
+              <a:t>입주 단지 맞춤 유상옵션 상시 추가 구성</a:t>
+            </a:r>
+          </a:p>
+        </p:txBody>
+      </p:sp>
+      <p:sp>
+        <p:nvSpPr>
+          <p:cNvPr id="38" name="Rounded Rectangle 37"/>
+          <p:cNvSpPr/>
+          <p:nvPr/>
+        </p:nvSpPr>
+        <p:spPr>
+          <a:xfrm>
+            <a:off x="640080" y="6309360"/>
+            <a:ext cx="10972800" cy="365760"/>
+          </a:xfrm>
+          <a:prstGeom prst="roundRect">
+            <a:avLst/>
+          </a:prstGeom>
+          <a:solidFill>
+            <a:srgbClr val="EEF3FB"/>
+          </a:solidFill>
+          <a:ln>
+            <a:noFill/>
+          </a:ln>
+          <a:effectLst/>
+        </p:spPr>
+        <p:style>
+          <a:lnRef idx="1">
+            <a:schemeClr val="accent1"/>
+          </a:lnRef>
+          <a:fillRef idx="3">
+            <a:schemeClr val="accent1"/>
+          </a:fillRef>
+          <a:effectRef idx="2">
+            <a:schemeClr val="accent1"/>
+          </a:effectRef>
+          <a:fontRef idx="minor">
+            <a:schemeClr val="lt1"/>
+          </a:fontRef>
+        </p:style>
+        <p:txBody>
+          <a:bodyPr rtlCol="0" anchor="ctr"/>
+          <a:lstStyle/>
+          <a:p>
+            <a:pPr algn="ctr"/>
+          </a:p>
+        </p:txBody>
+      </p:sp>
+      <p:sp>
+        <p:nvSpPr>
+          <p:cNvPr id="39" name="TextBox 38"/>
+          <p:cNvSpPr txBox="1"/>
+          <p:nvPr/>
+        </p:nvSpPr>
+        <p:spPr>
+          <a:xfrm>
+            <a:off x="804671" y="6419088"/>
+            <a:ext cx="10643616" cy="146304"/>
+          </a:xfrm>
+          <a:prstGeom prst="rect">
+            <a:avLst/>
+          </a:prstGeom>
+          <a:noFill/>
+        </p:spPr>
+        <p:txBody>
+          <a:bodyPr wrap="square" lIns="0" rIns="0" tIns="0" bIns="0" anchor="ctr">
+            <a:spAutoFit/>
+          </a:bodyPr>
+          <a:lstStyle/>
+          <a:p>
+            <a:pPr algn="l">
+              <a:lnSpc>
                 <a:spcPct val="110000"/>
               </a:lnSpc>
             </a:pPr>
@@ -12939,7 +13732,7 @@
                 </a:solidFill>
                 <a:latin typeface="맑은 고딕"/>
               </a:rPr>
-              <a:t>📸 위 3컷은 회장 실제 앱 화면 자리 (주관사PT/img/app1~3.png · Desktop\아크로 사진 · ACRO_App_Prototype_KR.html 캡처).</a:t>
+              <a:t>정확 품목·시공범위·가격은 단지/회장 확정 후 구성 (가격 미표기).</a:t>
             </a:r>
           </a:p>
         </p:txBody>
@@ -13049,7 +13842,7 @@
                 </a:solidFill>
                 <a:latin typeface="맑은 고딕"/>
               </a:rPr>
-              <a:t>왜 엣지컴퍼니인가</a:t>
+              <a:t>ACRO 스마트홈 — 국내 최초 통합 앱</a:t>
             </a:r>
           </a:p>
         </p:txBody>
@@ -13088,7 +13881,7 @@
                 </a:solidFill>
                 <a:latin typeface="맑은 고딕"/>
               </a:rPr>
-              <a:t>Why Edge Company</a:t>
+              <a:t>Smart-Home System</a:t>
             </a:r>
           </a:p>
         </p:txBody>
@@ -13184,19 +13977,17 @@
         </p:nvSpPr>
         <p:spPr>
           <a:xfrm>
-            <a:off x="640080" y="1783080"/>
-            <a:ext cx="3520440" cy="1508760"/>
+            <a:off x="640080" y="1737360"/>
+            <a:ext cx="10972800" cy="1143000"/>
           </a:xfrm>
           <a:prstGeom prst="roundRect">
             <a:avLst/>
           </a:prstGeom>
           <a:solidFill>
-            <a:srgbClr val="FFFFFF"/>
+            <a:srgbClr val="12347A"/>
           </a:solidFill>
-          <a:ln w="12700">
-            <a:solidFill>
-              <a:srgbClr val="E3E8F0"/>
-            </a:solidFill>
+          <a:ln>
+            <a:noFill/>
           </a:ln>
           <a:effectLst/>
         </p:spPr>
@@ -13230,8 +14021,8 @@
         </p:nvSpPr>
         <p:spPr>
           <a:xfrm>
-            <a:off x="841247" y="1965960"/>
-            <a:ext cx="3118104" cy="365760"/>
+            <a:off x="914400" y="1874519"/>
+            <a:ext cx="10424160" cy="320040"/>
           </a:xfrm>
           <a:prstGeom prst="rect">
             <a:avLst/>
@@ -13250,13 +14041,13 @@
               </a:lnSpc>
             </a:pPr>
             <a:r>
-              <a:rPr sz="1350" b="1">
-                <a:solidFill>
-                  <a:srgbClr val="1A2230"/>
-                </a:solidFill>
-                <a:latin typeface="맑은 고딕"/>
-              </a:rPr>
-              <a:t>🌀 자체 제품 제조</a:t>
+              <a:rPr sz="1100" b="1">
+                <a:solidFill>
+                  <a:srgbClr val="CADCFC"/>
+                </a:solidFill>
+                <a:latin typeface="맑은 고딕"/>
+              </a:rPr>
+              <a:t>KOREA FIRST · 자체 개발</a:t>
             </a:r>
           </a:p>
         </p:txBody>
@@ -13269,8 +14060,8 @@
         </p:nvSpPr>
         <p:spPr>
           <a:xfrm>
-            <a:off x="841247" y="2350008"/>
-            <a:ext cx="3118104" cy="777239"/>
+            <a:off x="914400" y="2194560"/>
+            <a:ext cx="10424160" cy="640080"/>
           </a:xfrm>
           <a:prstGeom prst="rect">
             <a:avLst/>
@@ -13285,17 +14076,33 @@
           <a:p>
             <a:pPr algn="l">
               <a:lnSpc>
-                <a:spcPct val="112000"/>
-              </a:lnSpc>
-            </a:pPr>
-            <a:r>
-              <a:rPr sz="1100" b="0">
-                <a:solidFill>
-                  <a:srgbClr val="5B6678"/>
-                </a:solidFill>
-                <a:latin typeface="맑은 고딕"/>
-              </a:rPr>
-              <a:t>실링팬·조명·스위치·커튼·환기를 자체 브랜드로 제조·공급. 마진·하자 일원화.</a:t>
+                <a:spcPct val="115000"/>
+              </a:lnSpc>
+            </a:pPr>
+            <a:r>
+              <a:rPr sz="1700" b="1">
+                <a:solidFill>
+                  <a:srgbClr val="FFFFFF"/>
+                </a:solidFill>
+                <a:latin typeface="맑은 고딕"/>
+              </a:rPr>
+              <a:t>실링팬 · 전동커튼 · 스위치 · 조명 디밍을 하나의 앱으로 통합 제어</a:t>
+            </a:r>
+          </a:p>
+          <a:p>
+            <a:pPr algn="l">
+              <a:lnSpc>
+                <a:spcPct val="115000"/>
+              </a:lnSpc>
+            </a:pPr>
+            <a:r>
+              <a:rPr sz="1300" b="1">
+                <a:solidFill>
+                  <a:srgbClr val="CADCFC"/>
+                </a:solidFill>
+                <a:latin typeface="맑은 고딕"/>
+              </a:rPr>
+              <a:t>— 국내 최초 자체 개발 스마트홈 시스템 기술</a:t>
             </a:r>
           </a:p>
         </p:txBody>
@@ -13308,18 +14115,18 @@
         </p:nvSpPr>
         <p:spPr>
           <a:xfrm>
-            <a:off x="4343400" y="1783080"/>
-            <a:ext cx="3520440" cy="1508760"/>
+            <a:off x="2331720" y="3108960"/>
+            <a:ext cx="2377440" cy="2286000"/>
           </a:xfrm>
           <a:prstGeom prst="roundRect">
             <a:avLst/>
           </a:prstGeom>
           <a:solidFill>
-            <a:srgbClr val="FFFFFF"/>
+            <a:srgbClr val="F3F6FC"/>
           </a:solidFill>
-          <a:ln w="12700">
+          <a:ln w="19050">
             <a:solidFill>
-              <a:srgbClr val="E3E8F0"/>
+              <a:srgbClr val="B9C6DD"/>
             </a:solidFill>
           </a:ln>
           <a:effectLst/>
@@ -13354,96 +14161,89 @@
         </p:nvSpPr>
         <p:spPr>
           <a:xfrm>
-            <a:off x="4544568" y="1965960"/>
-            <a:ext cx="3118104" cy="365760"/>
-          </a:xfrm>
-          <a:prstGeom prst="rect">
-            <a:avLst/>
-          </a:prstGeom>
-          <a:noFill/>
-        </p:spPr>
-        <p:txBody>
-          <a:bodyPr wrap="square" lIns="0" rIns="0" tIns="0" bIns="0" anchor="t">
-            <a:spAutoFit/>
-          </a:bodyPr>
-          <a:lstStyle/>
-          <a:p>
-            <a:pPr algn="l">
-              <a:lnSpc>
-                <a:spcPct val="100000"/>
-              </a:lnSpc>
-            </a:pPr>
-            <a:r>
-              <a:rPr sz="1350" b="1">
-                <a:solidFill>
-                  <a:srgbClr val="1A2230"/>
-                </a:solidFill>
-                <a:latin typeface="맑은 고딕"/>
-              </a:rPr>
-              <a:t>📱 국내 최초 스마트홈</a:t>
-            </a:r>
-          </a:p>
-        </p:txBody>
-      </p:sp>
-      <p:sp>
-        <p:nvSpPr>
-          <p:cNvPr id="12" name="TextBox 11"/>
-          <p:cNvSpPr txBox="1"/>
-          <p:nvPr/>
-        </p:nvSpPr>
-        <p:spPr>
-          <a:xfrm>
-            <a:off x="4544568" y="2350008"/>
-            <a:ext cx="3118104" cy="777239"/>
-          </a:xfrm>
-          <a:prstGeom prst="rect">
-            <a:avLst/>
-          </a:prstGeom>
-          <a:noFill/>
-        </p:spPr>
-        <p:txBody>
-          <a:bodyPr wrap="square" lIns="0" rIns="0" tIns="0" bIns="0" anchor="t">
-            <a:spAutoFit/>
-          </a:bodyPr>
-          <a:lstStyle/>
-          <a:p>
-            <a:pPr algn="l">
-              <a:lnSpc>
-                <a:spcPct val="112000"/>
-              </a:lnSpc>
-            </a:pPr>
-            <a:r>
-              <a:rPr sz="1100" b="0">
-                <a:solidFill>
-                  <a:srgbClr val="5B6678"/>
-                </a:solidFill>
-                <a:latin typeface="맑은 고딕"/>
-              </a:rPr>
-              <a:t>팬·커튼·스위치·디밍 통합 앱 자체 개발. 경쟁사가 못 따라오는 기술.</a:t>
-            </a:r>
-          </a:p>
-        </p:txBody>
-      </p:sp>
-      <p:sp>
-        <p:nvSpPr>
-          <p:cNvPr id="13" name="Rounded Rectangle 12"/>
+            <a:off x="2331720" y="3657600"/>
+            <a:ext cx="2377440" cy="1280160"/>
+          </a:xfrm>
+          <a:prstGeom prst="rect">
+            <a:avLst/>
+          </a:prstGeom>
+          <a:noFill/>
+        </p:spPr>
+        <p:txBody>
+          <a:bodyPr wrap="square" lIns="0" rIns="0" tIns="0" bIns="0" anchor="ctr">
+            <a:spAutoFit/>
+          </a:bodyPr>
+          <a:lstStyle/>
+          <a:p>
+            <a:pPr algn="ctr">
+              <a:lnSpc>
+                <a:spcPct val="120000"/>
+              </a:lnSpc>
+            </a:pPr>
+            <a:r>
+              <a:rPr sz="2400" b="0">
+                <a:solidFill>
+                  <a:srgbClr val="7F8BA0"/>
+                </a:solidFill>
+                <a:latin typeface="맑은 고딕"/>
+              </a:rPr>
+              <a:t>📱</a:t>
+            </a:r>
+          </a:p>
+          <a:p>
+            <a:pPr algn="ctr">
+              <a:lnSpc>
+                <a:spcPct val="120000"/>
+              </a:lnSpc>
+            </a:pPr>
+            <a:r>
+              <a:rPr sz="1150" b="1">
+                <a:solidFill>
+                  <a:srgbClr val="48566B"/>
+                </a:solidFill>
+                <a:latin typeface="맑은 고딕"/>
+              </a:rPr>
+              <a:t>홈 대시보드</a:t>
+            </a:r>
+          </a:p>
+          <a:p>
+            <a:pPr algn="ctr">
+              <a:lnSpc>
+                <a:spcPct val="120000"/>
+              </a:lnSpc>
+            </a:pPr>
+            <a:r>
+              <a:rPr sz="950" b="0">
+                <a:solidFill>
+                  <a:srgbClr val="92A0B5"/>
+                </a:solidFill>
+                <a:latin typeface="맑은 고딕"/>
+              </a:rPr>
+              <a:t>기기 한눈에 제어</a:t>
+            </a:r>
+          </a:p>
+        </p:txBody>
+      </p:sp>
+      <p:sp>
+        <p:nvSpPr>
+          <p:cNvPr id="12" name="Rounded Rectangle 11"/>
           <p:cNvSpPr/>
           <p:nvPr/>
         </p:nvSpPr>
         <p:spPr>
           <a:xfrm>
-            <a:off x="8046720" y="1783080"/>
-            <a:ext cx="3520440" cy="1508760"/>
+            <a:off x="5166360" y="3108960"/>
+            <a:ext cx="2377440" cy="2286000"/>
           </a:xfrm>
           <a:prstGeom prst="roundRect">
             <a:avLst/>
           </a:prstGeom>
           <a:solidFill>
-            <a:srgbClr val="FFFFFF"/>
+            <a:srgbClr val="F3F6FC"/>
           </a:solidFill>
-          <a:ln w="12700">
+          <a:ln w="19050">
             <a:solidFill>
-              <a:srgbClr val="E3E8F0"/>
+              <a:srgbClr val="B9C6DD"/>
             </a:solidFill>
           </a:ln>
           <a:effectLst/>
@@ -13472,102 +14272,95 @@
       </p:sp>
       <p:sp>
         <p:nvSpPr>
-          <p:cNvPr id="14" name="TextBox 13"/>
-          <p:cNvSpPr txBox="1"/>
-          <p:nvPr/>
-        </p:nvSpPr>
-        <p:spPr>
-          <a:xfrm>
-            <a:off x="8247888" y="1965960"/>
-            <a:ext cx="3118104" cy="365760"/>
-          </a:xfrm>
-          <a:prstGeom prst="rect">
-            <a:avLst/>
-          </a:prstGeom>
-          <a:noFill/>
-        </p:spPr>
-        <p:txBody>
-          <a:bodyPr wrap="square" lIns="0" rIns="0" tIns="0" bIns="0" anchor="t">
-            <a:spAutoFit/>
-          </a:bodyPr>
-          <a:lstStyle/>
-          <a:p>
-            <a:pPr algn="l">
-              <a:lnSpc>
-                <a:spcPct val="100000"/>
-              </a:lnSpc>
-            </a:pPr>
-            <a:r>
-              <a:rPr sz="1350" b="1">
-                <a:solidFill>
-                  <a:srgbClr val="1A2230"/>
-                </a:solidFill>
-                <a:latin typeface="맑은 고딕"/>
-              </a:rPr>
-              <a:t>💡 실내·경관 조명</a:t>
-            </a:r>
-          </a:p>
-        </p:txBody>
-      </p:sp>
-      <p:sp>
-        <p:nvSpPr>
-          <p:cNvPr id="15" name="TextBox 14"/>
-          <p:cNvSpPr txBox="1"/>
-          <p:nvPr/>
-        </p:nvSpPr>
-        <p:spPr>
-          <a:xfrm>
-            <a:off x="8247888" y="2350008"/>
-            <a:ext cx="3118104" cy="777239"/>
-          </a:xfrm>
-          <a:prstGeom prst="rect">
-            <a:avLst/>
-          </a:prstGeom>
-          <a:noFill/>
-        </p:spPr>
-        <p:txBody>
-          <a:bodyPr wrap="square" lIns="0" rIns="0" tIns="0" bIns="0" anchor="t">
-            <a:spAutoFit/>
-          </a:bodyPr>
-          <a:lstStyle/>
-          <a:p>
-            <a:pPr algn="l">
-              <a:lnSpc>
-                <a:spcPct val="112000"/>
-              </a:lnSpc>
-            </a:pPr>
-            <a:r>
-              <a:rPr sz="1100" b="0">
-                <a:solidFill>
-                  <a:srgbClr val="5B6678"/>
-                </a:solidFill>
-                <a:latin typeface="맑은 고딕"/>
-              </a:rPr>
-              <a:t>주거·상업 실내조명 + 야간 경관조명 설계·시공·납품 일괄.</a:t>
-            </a:r>
-          </a:p>
-        </p:txBody>
-      </p:sp>
-      <p:sp>
-        <p:nvSpPr>
-          <p:cNvPr id="16" name="Rounded Rectangle 15"/>
+          <p:cNvPr id="13" name="TextBox 12"/>
+          <p:cNvSpPr txBox="1"/>
+          <p:nvPr/>
+        </p:nvSpPr>
+        <p:spPr>
+          <a:xfrm>
+            <a:off x="5166360" y="3657600"/>
+            <a:ext cx="2377440" cy="1280160"/>
+          </a:xfrm>
+          <a:prstGeom prst="rect">
+            <a:avLst/>
+          </a:prstGeom>
+          <a:noFill/>
+        </p:spPr>
+        <p:txBody>
+          <a:bodyPr wrap="square" lIns="0" rIns="0" tIns="0" bIns="0" anchor="ctr">
+            <a:spAutoFit/>
+          </a:bodyPr>
+          <a:lstStyle/>
+          <a:p>
+            <a:pPr algn="ctr">
+              <a:lnSpc>
+                <a:spcPct val="120000"/>
+              </a:lnSpc>
+            </a:pPr>
+            <a:r>
+              <a:rPr sz="2400" b="0">
+                <a:solidFill>
+                  <a:srgbClr val="7F8BA0"/>
+                </a:solidFill>
+                <a:latin typeface="맑은 고딕"/>
+              </a:rPr>
+              <a:t>🌀</a:t>
+            </a:r>
+          </a:p>
+          <a:p>
+            <a:pPr algn="ctr">
+              <a:lnSpc>
+                <a:spcPct val="120000"/>
+              </a:lnSpc>
+            </a:pPr>
+            <a:r>
+              <a:rPr sz="1150" b="1">
+                <a:solidFill>
+                  <a:srgbClr val="48566B"/>
+                </a:solidFill>
+                <a:latin typeface="맑은 고딕"/>
+              </a:rPr>
+              <a:t>팬 + 조명 디밍</a:t>
+            </a:r>
+          </a:p>
+          <a:p>
+            <a:pPr algn="ctr">
+              <a:lnSpc>
+                <a:spcPct val="120000"/>
+              </a:lnSpc>
+            </a:pPr>
+            <a:r>
+              <a:rPr sz="950" b="0">
+                <a:solidFill>
+                  <a:srgbClr val="92A0B5"/>
+                </a:solidFill>
+                <a:latin typeface="맑은 고딕"/>
+              </a:rPr>
+              <a:t>풍속·밝기·색온도</a:t>
+            </a:r>
+          </a:p>
+        </p:txBody>
+      </p:sp>
+      <p:sp>
+        <p:nvSpPr>
+          <p:cNvPr id="14" name="Rounded Rectangle 13"/>
           <p:cNvSpPr/>
           <p:nvPr/>
         </p:nvSpPr>
         <p:spPr>
           <a:xfrm>
-            <a:off x="640080" y="3429000"/>
-            <a:ext cx="3520440" cy="1508760"/>
+            <a:off x="8001000" y="3108960"/>
+            <a:ext cx="2377440" cy="2286000"/>
           </a:xfrm>
           <a:prstGeom prst="roundRect">
             <a:avLst/>
           </a:prstGeom>
           <a:solidFill>
-            <a:srgbClr val="FFFFFF"/>
+            <a:srgbClr val="F3F6FC"/>
           </a:solidFill>
-          <a:ln w="12700">
+          <a:ln w="19050">
             <a:solidFill>
-              <a:srgbClr val="E3E8F0"/>
+              <a:srgbClr val="B9C6DD"/>
             </a:solidFill>
           </a:ln>
           <a:effectLst/>
@@ -13596,340 +14389,85 @@
       </p:sp>
       <p:sp>
         <p:nvSpPr>
-          <p:cNvPr id="17" name="TextBox 16"/>
-          <p:cNvSpPr txBox="1"/>
-          <p:nvPr/>
-        </p:nvSpPr>
-        <p:spPr>
-          <a:xfrm>
-            <a:off x="841247" y="3611880"/>
-            <a:ext cx="3118104" cy="365760"/>
-          </a:xfrm>
-          <a:prstGeom prst="rect">
-            <a:avLst/>
-          </a:prstGeom>
-          <a:noFill/>
-        </p:spPr>
-        <p:txBody>
-          <a:bodyPr wrap="square" lIns="0" rIns="0" tIns="0" bIns="0" anchor="t">
-            <a:spAutoFit/>
-          </a:bodyPr>
-          <a:lstStyle/>
-          <a:p>
-            <a:pPr algn="l">
-              <a:lnSpc>
-                <a:spcPct val="100000"/>
-              </a:lnSpc>
-            </a:pPr>
-            <a:r>
-              <a:rPr sz="1350" b="1">
-                <a:solidFill>
-                  <a:srgbClr val="1A2230"/>
-                </a:solidFill>
-                <a:latin typeface="맑은 고딕"/>
-              </a:rPr>
-              <a:t>📦 공동구매 공급망</a:t>
-            </a:r>
-          </a:p>
-        </p:txBody>
-      </p:sp>
-      <p:sp>
-        <p:nvSpPr>
-          <p:cNvPr id="18" name="TextBox 17"/>
-          <p:cNvSpPr txBox="1"/>
-          <p:nvPr/>
-        </p:nvSpPr>
-        <p:spPr>
-          <a:xfrm>
-            <a:off x="841247" y="3995928"/>
-            <a:ext cx="3118104" cy="777239"/>
-          </a:xfrm>
-          <a:prstGeom prst="rect">
-            <a:avLst/>
-          </a:prstGeom>
-          <a:noFill/>
-        </p:spPr>
-        <p:txBody>
-          <a:bodyPr wrap="square" lIns="0" rIns="0" tIns="0" bIns="0" anchor="t">
-            <a:spAutoFit/>
-          </a:bodyPr>
-          <a:lstStyle/>
-          <a:p>
-            <a:pPr algn="l">
-              <a:lnSpc>
-                <a:spcPct val="112000"/>
-              </a:lnSpc>
-            </a:pPr>
-            <a:r>
-              <a:rPr sz="1100" b="0">
-                <a:solidFill>
-                  <a:srgbClr val="5B6678"/>
-                </a:solidFill>
-                <a:latin typeface="맑은 고딕"/>
-              </a:rPr>
-              <a:t>'25~'26 22단지·19,294세대 공급. 사송·에코델타 90% 수임.</a:t>
-            </a:r>
-          </a:p>
-        </p:txBody>
-      </p:sp>
-      <p:sp>
-        <p:nvSpPr>
-          <p:cNvPr id="19" name="Rounded Rectangle 18"/>
+          <p:cNvPr id="15" name="TextBox 14"/>
+          <p:cNvSpPr txBox="1"/>
+          <p:nvPr/>
+        </p:nvSpPr>
+        <p:spPr>
+          <a:xfrm>
+            <a:off x="8001000" y="3657600"/>
+            <a:ext cx="2377440" cy="1280160"/>
+          </a:xfrm>
+          <a:prstGeom prst="rect">
+            <a:avLst/>
+          </a:prstGeom>
+          <a:noFill/>
+        </p:spPr>
+        <p:txBody>
+          <a:bodyPr wrap="square" lIns="0" rIns="0" tIns="0" bIns="0" anchor="ctr">
+            <a:spAutoFit/>
+          </a:bodyPr>
+          <a:lstStyle/>
+          <a:p>
+            <a:pPr algn="ctr">
+              <a:lnSpc>
+                <a:spcPct val="120000"/>
+              </a:lnSpc>
+            </a:pPr>
+            <a:r>
+              <a:rPr sz="2400" b="0">
+                <a:solidFill>
+                  <a:srgbClr val="7F8BA0"/>
+                </a:solidFill>
+                <a:latin typeface="맑은 고딕"/>
+              </a:rPr>
+              <a:t>🪟</a:t>
+            </a:r>
+          </a:p>
+          <a:p>
+            <a:pPr algn="ctr">
+              <a:lnSpc>
+                <a:spcPct val="120000"/>
+              </a:lnSpc>
+            </a:pPr>
+            <a:r>
+              <a:rPr sz="1150" b="1">
+                <a:solidFill>
+                  <a:srgbClr val="48566B"/>
+                </a:solidFill>
+                <a:latin typeface="맑은 고딕"/>
+              </a:rPr>
+              <a:t>커튼·환기</a:t>
+            </a:r>
+          </a:p>
+          <a:p>
+            <a:pPr algn="ctr">
+              <a:lnSpc>
+                <a:spcPct val="120000"/>
+              </a:lnSpc>
+            </a:pPr>
+            <a:r>
+              <a:rPr sz="950" b="0">
+                <a:solidFill>
+                  <a:srgbClr val="92A0B5"/>
+                </a:solidFill>
+                <a:latin typeface="맑은 고딕"/>
+              </a:rPr>
+              <a:t>전동커튼·전열교환기</a:t>
+            </a:r>
+          </a:p>
+        </p:txBody>
+      </p:sp>
+      <p:sp>
+        <p:nvSpPr>
+          <p:cNvPr id="16" name="Rounded Rectangle 15"/>
           <p:cNvSpPr/>
           <p:nvPr/>
         </p:nvSpPr>
         <p:spPr>
           <a:xfrm>
-            <a:off x="4343400" y="3429000"/>
-            <a:ext cx="3520440" cy="1508760"/>
-          </a:xfrm>
-          <a:prstGeom prst="roundRect">
-            <a:avLst/>
-          </a:prstGeom>
-          <a:solidFill>
-            <a:srgbClr val="FFFFFF"/>
-          </a:solidFill>
-          <a:ln w="12700">
-            <a:solidFill>
-              <a:srgbClr val="E3E8F0"/>
-            </a:solidFill>
-          </a:ln>
-          <a:effectLst/>
-        </p:spPr>
-        <p:style>
-          <a:lnRef idx="1">
-            <a:schemeClr val="accent1"/>
-          </a:lnRef>
-          <a:fillRef idx="3">
-            <a:schemeClr val="accent1"/>
-          </a:fillRef>
-          <a:effectRef idx="2">
-            <a:schemeClr val="accent1"/>
-          </a:effectRef>
-          <a:fontRef idx="minor">
-            <a:schemeClr val="lt1"/>
-          </a:fontRef>
-        </p:style>
-        <p:txBody>
-          <a:bodyPr rtlCol="0" anchor="ctr"/>
-          <a:lstStyle/>
-          <a:p>
-            <a:pPr algn="ctr"/>
-          </a:p>
-        </p:txBody>
-      </p:sp>
-      <p:sp>
-        <p:nvSpPr>
-          <p:cNvPr id="20" name="TextBox 19"/>
-          <p:cNvSpPr txBox="1"/>
-          <p:nvPr/>
-        </p:nvSpPr>
-        <p:spPr>
-          <a:xfrm>
-            <a:off x="4544568" y="3611880"/>
-            <a:ext cx="3118104" cy="365760"/>
-          </a:xfrm>
-          <a:prstGeom prst="rect">
-            <a:avLst/>
-          </a:prstGeom>
-          <a:noFill/>
-        </p:spPr>
-        <p:txBody>
-          <a:bodyPr wrap="square" lIns="0" rIns="0" tIns="0" bIns="0" anchor="t">
-            <a:spAutoFit/>
-          </a:bodyPr>
-          <a:lstStyle/>
-          <a:p>
-            <a:pPr algn="l">
-              <a:lnSpc>
-                <a:spcPct val="100000"/>
-              </a:lnSpc>
-            </a:pPr>
-            <a:r>
-              <a:rPr sz="1350" b="1">
-                <a:solidFill>
-                  <a:srgbClr val="1A2230"/>
-                </a:solidFill>
-                <a:latin typeface="맑은 고딕"/>
-              </a:rPr>
-              <a:t>📈 견실한 재무</a:t>
-            </a:r>
-          </a:p>
-        </p:txBody>
-      </p:sp>
-      <p:sp>
-        <p:nvSpPr>
-          <p:cNvPr id="21" name="TextBox 20"/>
-          <p:cNvSpPr txBox="1"/>
-          <p:nvPr/>
-        </p:nvSpPr>
-        <p:spPr>
-          <a:xfrm>
-            <a:off x="4544568" y="3995928"/>
-            <a:ext cx="3118104" cy="777239"/>
-          </a:xfrm>
-          <a:prstGeom prst="rect">
-            <a:avLst/>
-          </a:prstGeom>
-          <a:noFill/>
-        </p:spPr>
-        <p:txBody>
-          <a:bodyPr wrap="square" lIns="0" rIns="0" tIns="0" bIns="0" anchor="t">
-            <a:spAutoFit/>
-          </a:bodyPr>
-          <a:lstStyle/>
-          <a:p>
-            <a:pPr algn="l">
-              <a:lnSpc>
-                <a:spcPct val="112000"/>
-              </a:lnSpc>
-            </a:pPr>
-            <a:r>
-              <a:rPr sz="1100" b="0">
-                <a:solidFill>
-                  <a:srgbClr val="5B6678"/>
-                </a:solidFill>
-                <a:latin typeface="맑은 고딕"/>
-              </a:rPr>
-              <a:t>매출 52억 · NICE D&amp;B 신용 BB · 현금흐름 A · 자본금 2억.</a:t>
-            </a:r>
-          </a:p>
-        </p:txBody>
-      </p:sp>
-      <p:sp>
-        <p:nvSpPr>
-          <p:cNvPr id="22" name="Rounded Rectangle 21"/>
-          <p:cNvSpPr/>
-          <p:nvPr/>
-        </p:nvSpPr>
-        <p:spPr>
-          <a:xfrm>
-            <a:off x="8046720" y="3429000"/>
-            <a:ext cx="3520440" cy="1508760"/>
-          </a:xfrm>
-          <a:prstGeom prst="roundRect">
-            <a:avLst/>
-          </a:prstGeom>
-          <a:solidFill>
-            <a:srgbClr val="FFFFFF"/>
-          </a:solidFill>
-          <a:ln w="12700">
-            <a:solidFill>
-              <a:srgbClr val="E3E8F0"/>
-            </a:solidFill>
-          </a:ln>
-          <a:effectLst/>
-        </p:spPr>
-        <p:style>
-          <a:lnRef idx="1">
-            <a:schemeClr val="accent1"/>
-          </a:lnRef>
-          <a:fillRef idx="3">
-            <a:schemeClr val="accent1"/>
-          </a:fillRef>
-          <a:effectRef idx="2">
-            <a:schemeClr val="accent1"/>
-          </a:effectRef>
-          <a:fontRef idx="minor">
-            <a:schemeClr val="lt1"/>
-          </a:fontRef>
-        </p:style>
-        <p:txBody>
-          <a:bodyPr rtlCol="0" anchor="ctr"/>
-          <a:lstStyle/>
-          <a:p>
-            <a:pPr algn="ctr"/>
-          </a:p>
-        </p:txBody>
-      </p:sp>
-      <p:sp>
-        <p:nvSpPr>
-          <p:cNvPr id="23" name="TextBox 22"/>
-          <p:cNvSpPr txBox="1"/>
-          <p:nvPr/>
-        </p:nvSpPr>
-        <p:spPr>
-          <a:xfrm>
-            <a:off x="8247888" y="3611880"/>
-            <a:ext cx="3118104" cy="365760"/>
-          </a:xfrm>
-          <a:prstGeom prst="rect">
-            <a:avLst/>
-          </a:prstGeom>
-          <a:noFill/>
-        </p:spPr>
-        <p:txBody>
-          <a:bodyPr wrap="square" lIns="0" rIns="0" tIns="0" bIns="0" anchor="t">
-            <a:spAutoFit/>
-          </a:bodyPr>
-          <a:lstStyle/>
-          <a:p>
-            <a:pPr algn="l">
-              <a:lnSpc>
-                <a:spcPct val="100000"/>
-              </a:lnSpc>
-            </a:pPr>
-            <a:r>
-              <a:rPr sz="1350" b="1">
-                <a:solidFill>
-                  <a:srgbClr val="1A2230"/>
-                </a:solidFill>
-                <a:latin typeface="맑은 고딕"/>
-              </a:rPr>
-              <a:t>🌐 전국 22개 지사</a:t>
-            </a:r>
-          </a:p>
-        </p:txBody>
-      </p:sp>
-      <p:sp>
-        <p:nvSpPr>
-          <p:cNvPr id="24" name="TextBox 23"/>
-          <p:cNvSpPr txBox="1"/>
-          <p:nvPr/>
-        </p:nvSpPr>
-        <p:spPr>
-          <a:xfrm>
-            <a:off x="8247888" y="3995928"/>
-            <a:ext cx="3118104" cy="777239"/>
-          </a:xfrm>
-          <a:prstGeom prst="rect">
-            <a:avLst/>
-          </a:prstGeom>
-          <a:noFill/>
-        </p:spPr>
-        <p:txBody>
-          <a:bodyPr wrap="square" lIns="0" rIns="0" tIns="0" bIns="0" anchor="t">
-            <a:spAutoFit/>
-          </a:bodyPr>
-          <a:lstStyle/>
-          <a:p>
-            <a:pPr algn="l">
-              <a:lnSpc>
-                <a:spcPct val="112000"/>
-              </a:lnSpc>
-            </a:pPr>
-            <a:r>
-              <a:rPr sz="1100" b="0">
-                <a:solidFill>
-                  <a:srgbClr val="5B6678"/>
-                </a:solidFill>
-                <a:latin typeface="맑은 고딕"/>
-              </a:rPr>
-              <a:t>본사 울산 + 전국 22개 지사망으로 현장 대응·납기 안정.</a:t>
-            </a:r>
-          </a:p>
-        </p:txBody>
-      </p:sp>
-      <p:sp>
-        <p:nvSpPr>
-          <p:cNvPr id="25" name="Rounded Rectangle 24"/>
-          <p:cNvSpPr/>
-          <p:nvPr/>
-        </p:nvSpPr>
-        <p:spPr>
-          <a:xfrm>
-            <a:off x="640080" y="5257800"/>
-            <a:ext cx="10972800" cy="1234440"/>
+            <a:off x="640080" y="5577840"/>
+            <a:ext cx="10972800" cy="457200"/>
           </a:xfrm>
           <a:prstGeom prst="roundRect">
             <a:avLst/>
@@ -13966,94 +14504,39 @@
       </p:sp>
       <p:sp>
         <p:nvSpPr>
-          <p:cNvPr id="26" name="TextBox 25"/>
-          <p:cNvSpPr txBox="1"/>
-          <p:nvPr/>
-        </p:nvSpPr>
-        <p:spPr>
-          <a:xfrm>
-            <a:off x="868680" y="5440680"/>
-            <a:ext cx="10515600" cy="320040"/>
-          </a:xfrm>
-          <a:prstGeom prst="rect">
-            <a:avLst/>
-          </a:prstGeom>
-          <a:noFill/>
-        </p:spPr>
-        <p:txBody>
-          <a:bodyPr wrap="square" lIns="0" rIns="0" tIns="0" bIns="0" anchor="t">
+          <p:cNvPr id="17" name="TextBox 16"/>
+          <p:cNvSpPr txBox="1"/>
+          <p:nvPr/>
+        </p:nvSpPr>
+        <p:spPr>
+          <a:xfrm>
+            <a:off x="804671" y="5687568"/>
+            <a:ext cx="10643616" cy="237744"/>
+          </a:xfrm>
+          <a:prstGeom prst="rect">
+            <a:avLst/>
+          </a:prstGeom>
+          <a:noFill/>
+        </p:spPr>
+        <p:txBody>
+          <a:bodyPr wrap="square" lIns="0" rIns="0" tIns="0" bIns="0" anchor="ctr">
             <a:spAutoFit/>
           </a:bodyPr>
           <a:lstStyle/>
           <a:p>
             <a:pPr algn="l">
               <a:lnSpc>
-                <a:spcPct val="100000"/>
-              </a:lnSpc>
-            </a:pPr>
-            <a:r>
-              <a:rPr sz="1350" b="1">
-                <a:solidFill>
-                  <a:srgbClr val="12347A"/>
-                </a:solidFill>
-                <a:latin typeface="맑은 고딕"/>
-              </a:rPr>
-              <a:t>건설사·시행사 협력 제안</a:t>
-            </a:r>
-          </a:p>
-        </p:txBody>
-      </p:sp>
-      <p:sp>
-        <p:nvSpPr>
-          <p:cNvPr id="27" name="TextBox 26"/>
-          <p:cNvSpPr txBox="1"/>
-          <p:nvPr/>
-        </p:nvSpPr>
-        <p:spPr>
-          <a:xfrm>
-            <a:off x="868680" y="5852160"/>
-            <a:ext cx="10515600" cy="594360"/>
-          </a:xfrm>
-          <a:prstGeom prst="rect">
-            <a:avLst/>
-          </a:prstGeom>
-          <a:noFill/>
-        </p:spPr>
-        <p:txBody>
-          <a:bodyPr wrap="square" lIns="0" rIns="0" tIns="0" bIns="0" anchor="t">
-            <a:spAutoFit/>
-          </a:bodyPr>
-          <a:lstStyle/>
-          <a:p>
-            <a:pPr algn="l">
-              <a:lnSpc>
-                <a:spcPct val="125000"/>
-              </a:lnSpc>
-            </a:pPr>
-            <a:r>
-              <a:rPr sz="1100" b="0">
-                <a:solidFill>
-                  <a:srgbClr val="33404F"/>
-                </a:solidFill>
-                <a:latin typeface="맑은 고딕"/>
-              </a:rPr>
-              <a:t>✓ 단지 ACRO 스마트홈 빌트인/옵션 패키지   ✓ 실내·경관 조명 설계·시공·납품</a:t>
-            </a:r>
-          </a:p>
-          <a:p>
-            <a:pPr algn="l">
-              <a:lnSpc>
-                <a:spcPct val="125000"/>
-              </a:lnSpc>
-            </a:pPr>
-            <a:r>
-              <a:rPr sz="1100" b="0">
-                <a:solidFill>
-                  <a:srgbClr val="33404F"/>
-                </a:solidFill>
-                <a:latin typeface="맑은 고딕"/>
-              </a:rPr>
-              <a:t>✓ 공동구매 제품 공급   ✓ 준공 후 장기 A/S 협약</a:t>
+                <a:spcPct val="110000"/>
+              </a:lnSpc>
+            </a:pPr>
+            <a:r>
+              <a:rPr sz="1030" b="0">
+                <a:solidFill>
+                  <a:srgbClr val="3F4D63"/>
+                </a:solidFill>
+                <a:latin typeface="맑은 고딕"/>
+              </a:rPr>
+              <a:t>📸 위 3컷은 회장 실제 앱 화면 자리 (주관사PT/img/app1~3.png · Desktop\아크로 사진 · ACRO_App_Prototype_KR.html 캡처).</a:t>
             </a:r>
           </a:p>
         </p:txBody>
@@ -14163,7 +14646,7 @@
                 </a:solidFill>
                 <a:latin typeface="맑은 고딕"/>
               </a:rPr>
-              <a:t>연락처</a:t>
+              <a:t>왜 엣지컴퍼니인가</a:t>
             </a:r>
           </a:p>
         </p:txBody>
@@ -14202,7 +14685,7 @@
                 </a:solidFill>
                 <a:latin typeface="맑은 고딕"/>
               </a:rPr>
-              <a:t>Contact</a:t>
+              <a:t>Why Edge Company</a:t>
             </a:r>
           </a:p>
         </p:txBody>
@@ -14292,22 +14775,22 @@
       </p:sp>
       <p:sp>
         <p:nvSpPr>
-          <p:cNvPr id="7" name="Rectangle 6"/>
+          <p:cNvPr id="7" name="Rounded Rectangle 6"/>
           <p:cNvSpPr/>
           <p:nvPr/>
         </p:nvSpPr>
         <p:spPr>
           <a:xfrm>
-            <a:off x="640080" y="1828800"/>
-            <a:ext cx="2743200" cy="475488"/>
-          </a:xfrm>
-          <a:prstGeom prst="rect">
+            <a:off x="640080" y="1783080"/>
+            <a:ext cx="3520440" cy="1508760"/>
+          </a:xfrm>
+          <a:prstGeom prst="roundRect">
             <a:avLst/>
           </a:prstGeom>
           <a:solidFill>
-            <a:srgbClr val="EEF3FB"/>
+            <a:srgbClr val="FFFFFF"/>
           </a:solidFill>
-          <a:ln w="9525">
+          <a:ln w="12700">
             <a:solidFill>
               <a:srgbClr val="E3E8F0"/>
             </a:solidFill>
@@ -14344,16 +14827,16 @@
         </p:nvSpPr>
         <p:spPr>
           <a:xfrm>
-            <a:off x="777240" y="1828800"/>
-            <a:ext cx="2560320" cy="475488"/>
-          </a:xfrm>
-          <a:prstGeom prst="rect">
-            <a:avLst/>
-          </a:prstGeom>
-          <a:noFill/>
-        </p:spPr>
-        <p:txBody>
-          <a:bodyPr wrap="square" lIns="0" rIns="0" tIns="0" bIns="0" anchor="ctr">
+            <a:off x="841247" y="1965960"/>
+            <a:ext cx="3118104" cy="365760"/>
+          </a:xfrm>
+          <a:prstGeom prst="rect">
+            <a:avLst/>
+          </a:prstGeom>
+          <a:noFill/>
+        </p:spPr>
+        <p:txBody>
+          <a:bodyPr wrap="square" lIns="0" rIns="0" tIns="0" bIns="0" anchor="t">
             <a:spAutoFit/>
           </a:bodyPr>
           <a:lstStyle/>
@@ -14364,35 +14847,74 @@
               </a:lnSpc>
             </a:pPr>
             <a:r>
-              <a:rPr sz="1100" b="1">
-                <a:solidFill>
-                  <a:srgbClr val="12347A"/>
-                </a:solidFill>
-                <a:latin typeface="맑은 고딕"/>
-              </a:rPr>
-              <a:t>대표이사</a:t>
-            </a:r>
-          </a:p>
-        </p:txBody>
-      </p:sp>
-      <p:sp>
-        <p:nvSpPr>
-          <p:cNvPr id="9" name="Rectangle 8"/>
+              <a:rPr sz="1350" b="1">
+                <a:solidFill>
+                  <a:srgbClr val="1A2230"/>
+                </a:solidFill>
+                <a:latin typeface="맑은 고딕"/>
+              </a:rPr>
+              <a:t>🌀 자체 제품 제조</a:t>
+            </a:r>
+          </a:p>
+        </p:txBody>
+      </p:sp>
+      <p:sp>
+        <p:nvSpPr>
+          <p:cNvPr id="9" name="TextBox 8"/>
+          <p:cNvSpPr txBox="1"/>
+          <p:nvPr/>
+        </p:nvSpPr>
+        <p:spPr>
+          <a:xfrm>
+            <a:off x="841247" y="2350008"/>
+            <a:ext cx="3118104" cy="777239"/>
+          </a:xfrm>
+          <a:prstGeom prst="rect">
+            <a:avLst/>
+          </a:prstGeom>
+          <a:noFill/>
+        </p:spPr>
+        <p:txBody>
+          <a:bodyPr wrap="square" lIns="0" rIns="0" tIns="0" bIns="0" anchor="t">
+            <a:spAutoFit/>
+          </a:bodyPr>
+          <a:lstStyle/>
+          <a:p>
+            <a:pPr algn="l">
+              <a:lnSpc>
+                <a:spcPct val="112000"/>
+              </a:lnSpc>
+            </a:pPr>
+            <a:r>
+              <a:rPr sz="1100" b="0">
+                <a:solidFill>
+                  <a:srgbClr val="5B6678"/>
+                </a:solidFill>
+                <a:latin typeface="맑은 고딕"/>
+              </a:rPr>
+              <a:t>실링팬·조명·스위치·커튼·환기를 자체 브랜드로 제조·공급. 마진·하자 일원화.</a:t>
+            </a:r>
+          </a:p>
+        </p:txBody>
+      </p:sp>
+      <p:sp>
+        <p:nvSpPr>
+          <p:cNvPr id="10" name="Rounded Rectangle 9"/>
           <p:cNvSpPr/>
           <p:nvPr/>
         </p:nvSpPr>
         <p:spPr>
           <a:xfrm>
-            <a:off x="3383280" y="1828800"/>
-            <a:ext cx="8183879" cy="475488"/>
-          </a:xfrm>
-          <a:prstGeom prst="rect">
+            <a:off x="4343400" y="1783080"/>
+            <a:ext cx="3520440" cy="1508760"/>
+          </a:xfrm>
+          <a:prstGeom prst="roundRect">
             <a:avLst/>
           </a:prstGeom>
           <a:solidFill>
             <a:srgbClr val="FFFFFF"/>
           </a:solidFill>
-          <a:ln w="9525">
+          <a:ln w="12700">
             <a:solidFill>
               <a:srgbClr val="E3E8F0"/>
             </a:solidFill>
@@ -14423,22 +14945,22 @@
       </p:sp>
       <p:sp>
         <p:nvSpPr>
-          <p:cNvPr id="10" name="TextBox 9"/>
-          <p:cNvSpPr txBox="1"/>
-          <p:nvPr/>
-        </p:nvSpPr>
-        <p:spPr>
-          <a:xfrm>
-            <a:off x="3547872" y="1828800"/>
-            <a:ext cx="7955279" cy="475488"/>
-          </a:xfrm>
-          <a:prstGeom prst="rect">
-            <a:avLst/>
-          </a:prstGeom>
-          <a:noFill/>
-        </p:spPr>
-        <p:txBody>
-          <a:bodyPr wrap="square" lIns="0" rIns="0" tIns="0" bIns="0" anchor="ctr">
+          <p:cNvPr id="11" name="TextBox 10"/>
+          <p:cNvSpPr txBox="1"/>
+          <p:nvPr/>
+        </p:nvSpPr>
+        <p:spPr>
+          <a:xfrm>
+            <a:off x="4544568" y="1965960"/>
+            <a:ext cx="3118104" cy="365760"/>
+          </a:xfrm>
+          <a:prstGeom prst="rect">
+            <a:avLst/>
+          </a:prstGeom>
+          <a:noFill/>
+        </p:spPr>
+        <p:txBody>
+          <a:bodyPr wrap="square" lIns="0" rIns="0" tIns="0" bIns="0" anchor="t">
             <a:spAutoFit/>
           </a:bodyPr>
           <a:lstStyle/>
@@ -14449,35 +14971,74 @@
               </a:lnSpc>
             </a:pPr>
             <a:r>
+              <a:rPr sz="1350" b="1">
+                <a:solidFill>
+                  <a:srgbClr val="1A2230"/>
+                </a:solidFill>
+                <a:latin typeface="맑은 고딕"/>
+              </a:rPr>
+              <a:t>📱 국내 최초 스마트홈</a:t>
+            </a:r>
+          </a:p>
+        </p:txBody>
+      </p:sp>
+      <p:sp>
+        <p:nvSpPr>
+          <p:cNvPr id="12" name="TextBox 11"/>
+          <p:cNvSpPr txBox="1"/>
+          <p:nvPr/>
+        </p:nvSpPr>
+        <p:spPr>
+          <a:xfrm>
+            <a:off x="4544568" y="2350008"/>
+            <a:ext cx="3118104" cy="777239"/>
+          </a:xfrm>
+          <a:prstGeom prst="rect">
+            <a:avLst/>
+          </a:prstGeom>
+          <a:noFill/>
+        </p:spPr>
+        <p:txBody>
+          <a:bodyPr wrap="square" lIns="0" rIns="0" tIns="0" bIns="0" anchor="t">
+            <a:spAutoFit/>
+          </a:bodyPr>
+          <a:lstStyle/>
+          <a:p>
+            <a:pPr algn="l">
+              <a:lnSpc>
+                <a:spcPct val="112000"/>
+              </a:lnSpc>
+            </a:pPr>
+            <a:r>
               <a:rPr sz="1100" b="0">
                 <a:solidFill>
-                  <a:srgbClr val="1A2230"/>
-                </a:solidFill>
-                <a:latin typeface="맑은 고딕"/>
-              </a:rPr>
-              <a:t>고진식</a:t>
-            </a:r>
-          </a:p>
-        </p:txBody>
-      </p:sp>
-      <p:sp>
-        <p:nvSpPr>
-          <p:cNvPr id="11" name="Rectangle 10"/>
+                  <a:srgbClr val="5B6678"/>
+                </a:solidFill>
+                <a:latin typeface="맑은 고딕"/>
+              </a:rPr>
+              <a:t>팬·커튼·스위치·디밍 통합 앱 자체 개발. 경쟁사가 못 따라오는 기술.</a:t>
+            </a:r>
+          </a:p>
+        </p:txBody>
+      </p:sp>
+      <p:sp>
+        <p:nvSpPr>
+          <p:cNvPr id="13" name="Rounded Rectangle 12"/>
           <p:cNvSpPr/>
           <p:nvPr/>
         </p:nvSpPr>
         <p:spPr>
           <a:xfrm>
-            <a:off x="640080" y="2304288"/>
-            <a:ext cx="2743200" cy="475488"/>
-          </a:xfrm>
-          <a:prstGeom prst="rect">
+            <a:off x="8046720" y="1783080"/>
+            <a:ext cx="3520440" cy="1508760"/>
+          </a:xfrm>
+          <a:prstGeom prst="roundRect">
             <a:avLst/>
           </a:prstGeom>
           <a:solidFill>
-            <a:srgbClr val="EEF3FB"/>
+            <a:srgbClr val="FFFFFF"/>
           </a:solidFill>
-          <a:ln w="9525">
+          <a:ln w="12700">
             <a:solidFill>
               <a:srgbClr val="E3E8F0"/>
             </a:solidFill>
@@ -14508,22 +15069,22 @@
       </p:sp>
       <p:sp>
         <p:nvSpPr>
-          <p:cNvPr id="12" name="TextBox 11"/>
-          <p:cNvSpPr txBox="1"/>
-          <p:nvPr/>
-        </p:nvSpPr>
-        <p:spPr>
-          <a:xfrm>
-            <a:off x="777240" y="2304288"/>
-            <a:ext cx="2560320" cy="475488"/>
-          </a:xfrm>
-          <a:prstGeom prst="rect">
-            <a:avLst/>
-          </a:prstGeom>
-          <a:noFill/>
-        </p:spPr>
-        <p:txBody>
-          <a:bodyPr wrap="square" lIns="0" rIns="0" tIns="0" bIns="0" anchor="ctr">
+          <p:cNvPr id="14" name="TextBox 13"/>
+          <p:cNvSpPr txBox="1"/>
+          <p:nvPr/>
+        </p:nvSpPr>
+        <p:spPr>
+          <a:xfrm>
+            <a:off x="8247888" y="1965960"/>
+            <a:ext cx="3118104" cy="365760"/>
+          </a:xfrm>
+          <a:prstGeom prst="rect">
+            <a:avLst/>
+          </a:prstGeom>
+          <a:noFill/>
+        </p:spPr>
+        <p:txBody>
+          <a:bodyPr wrap="square" lIns="0" rIns="0" tIns="0" bIns="0" anchor="t">
             <a:spAutoFit/>
           </a:bodyPr>
           <a:lstStyle/>
@@ -14534,35 +15095,74 @@
               </a:lnSpc>
             </a:pPr>
             <a:r>
-              <a:rPr sz="1100" b="1">
-                <a:solidFill>
-                  <a:srgbClr val="12347A"/>
-                </a:solidFill>
-                <a:latin typeface="맑은 고딕"/>
-              </a:rPr>
-              <a:t>대표번호</a:t>
-            </a:r>
-          </a:p>
-        </p:txBody>
-      </p:sp>
-      <p:sp>
-        <p:nvSpPr>
-          <p:cNvPr id="13" name="Rectangle 12"/>
+              <a:rPr sz="1350" b="1">
+                <a:solidFill>
+                  <a:srgbClr val="1A2230"/>
+                </a:solidFill>
+                <a:latin typeface="맑은 고딕"/>
+              </a:rPr>
+              <a:t>💡 실내·경관 조명</a:t>
+            </a:r>
+          </a:p>
+        </p:txBody>
+      </p:sp>
+      <p:sp>
+        <p:nvSpPr>
+          <p:cNvPr id="15" name="TextBox 14"/>
+          <p:cNvSpPr txBox="1"/>
+          <p:nvPr/>
+        </p:nvSpPr>
+        <p:spPr>
+          <a:xfrm>
+            <a:off x="8247888" y="2350008"/>
+            <a:ext cx="3118104" cy="777239"/>
+          </a:xfrm>
+          <a:prstGeom prst="rect">
+            <a:avLst/>
+          </a:prstGeom>
+          <a:noFill/>
+        </p:spPr>
+        <p:txBody>
+          <a:bodyPr wrap="square" lIns="0" rIns="0" tIns="0" bIns="0" anchor="t">
+            <a:spAutoFit/>
+          </a:bodyPr>
+          <a:lstStyle/>
+          <a:p>
+            <a:pPr algn="l">
+              <a:lnSpc>
+                <a:spcPct val="112000"/>
+              </a:lnSpc>
+            </a:pPr>
+            <a:r>
+              <a:rPr sz="1100" b="0">
+                <a:solidFill>
+                  <a:srgbClr val="5B6678"/>
+                </a:solidFill>
+                <a:latin typeface="맑은 고딕"/>
+              </a:rPr>
+              <a:t>주거·상업 실내조명 + 야간 경관조명 설계·시공·납품 일괄.</a:t>
+            </a:r>
+          </a:p>
+        </p:txBody>
+      </p:sp>
+      <p:sp>
+        <p:nvSpPr>
+          <p:cNvPr id="16" name="Rounded Rectangle 15"/>
           <p:cNvSpPr/>
           <p:nvPr/>
         </p:nvSpPr>
         <p:spPr>
           <a:xfrm>
-            <a:off x="3383280" y="2304288"/>
-            <a:ext cx="8183879" cy="475488"/>
-          </a:xfrm>
-          <a:prstGeom prst="rect">
+            <a:off x="640080" y="3429000"/>
+            <a:ext cx="3520440" cy="1508760"/>
+          </a:xfrm>
+          <a:prstGeom prst="roundRect">
             <a:avLst/>
           </a:prstGeom>
           <a:solidFill>
             <a:srgbClr val="FFFFFF"/>
           </a:solidFill>
-          <a:ln w="9525">
+          <a:ln w="12700">
             <a:solidFill>
               <a:srgbClr val="E3E8F0"/>
             </a:solidFill>
@@ -14593,22 +15193,22 @@
       </p:sp>
       <p:sp>
         <p:nvSpPr>
-          <p:cNvPr id="14" name="TextBox 13"/>
-          <p:cNvSpPr txBox="1"/>
-          <p:nvPr/>
-        </p:nvSpPr>
-        <p:spPr>
-          <a:xfrm>
-            <a:off x="3547872" y="2304288"/>
-            <a:ext cx="7955279" cy="475488"/>
-          </a:xfrm>
-          <a:prstGeom prst="rect">
-            <a:avLst/>
-          </a:prstGeom>
-          <a:noFill/>
-        </p:spPr>
-        <p:txBody>
-          <a:bodyPr wrap="square" lIns="0" rIns="0" tIns="0" bIns="0" anchor="ctr">
+          <p:cNvPr id="17" name="TextBox 16"/>
+          <p:cNvSpPr txBox="1"/>
+          <p:nvPr/>
+        </p:nvSpPr>
+        <p:spPr>
+          <a:xfrm>
+            <a:off x="841247" y="3611880"/>
+            <a:ext cx="3118104" cy="365760"/>
+          </a:xfrm>
+          <a:prstGeom prst="rect">
+            <a:avLst/>
+          </a:prstGeom>
+          <a:noFill/>
+        </p:spPr>
+        <p:txBody>
+          <a:bodyPr wrap="square" lIns="0" rIns="0" tIns="0" bIns="0" anchor="t">
             <a:spAutoFit/>
           </a:bodyPr>
           <a:lstStyle/>
@@ -14619,35 +15219,74 @@
               </a:lnSpc>
             </a:pPr>
             <a:r>
+              <a:rPr sz="1350" b="1">
+                <a:solidFill>
+                  <a:srgbClr val="1A2230"/>
+                </a:solidFill>
+                <a:latin typeface="맑은 고딕"/>
+              </a:rPr>
+              <a:t>📦 공동구매 공급망</a:t>
+            </a:r>
+          </a:p>
+        </p:txBody>
+      </p:sp>
+      <p:sp>
+        <p:nvSpPr>
+          <p:cNvPr id="18" name="TextBox 17"/>
+          <p:cNvSpPr txBox="1"/>
+          <p:nvPr/>
+        </p:nvSpPr>
+        <p:spPr>
+          <a:xfrm>
+            <a:off x="841247" y="3995928"/>
+            <a:ext cx="3118104" cy="777239"/>
+          </a:xfrm>
+          <a:prstGeom prst="rect">
+            <a:avLst/>
+          </a:prstGeom>
+          <a:noFill/>
+        </p:spPr>
+        <p:txBody>
+          <a:bodyPr wrap="square" lIns="0" rIns="0" tIns="0" bIns="0" anchor="t">
+            <a:spAutoFit/>
+          </a:bodyPr>
+          <a:lstStyle/>
+          <a:p>
+            <a:pPr algn="l">
+              <a:lnSpc>
+                <a:spcPct val="112000"/>
+              </a:lnSpc>
+            </a:pPr>
+            <a:r>
               <a:rPr sz="1100" b="0">
                 <a:solidFill>
-                  <a:srgbClr val="1A2230"/>
-                </a:solidFill>
-                <a:latin typeface="맑은 고딕"/>
-              </a:rPr>
-              <a:t>1533-3210</a:t>
-            </a:r>
-          </a:p>
-        </p:txBody>
-      </p:sp>
-      <p:sp>
-        <p:nvSpPr>
-          <p:cNvPr id="15" name="Rectangle 14"/>
+                  <a:srgbClr val="5B6678"/>
+                </a:solidFill>
+                <a:latin typeface="맑은 고딕"/>
+              </a:rPr>
+              <a:t>'25~'26 22단지·19,294세대 공급. 사송·에코델타 90% 수임.</a:t>
+            </a:r>
+          </a:p>
+        </p:txBody>
+      </p:sp>
+      <p:sp>
+        <p:nvSpPr>
+          <p:cNvPr id="19" name="Rounded Rectangle 18"/>
           <p:cNvSpPr/>
           <p:nvPr/>
         </p:nvSpPr>
         <p:spPr>
           <a:xfrm>
-            <a:off x="640080" y="2779776"/>
-            <a:ext cx="2743200" cy="475488"/>
-          </a:xfrm>
-          <a:prstGeom prst="rect">
+            <a:off x="4343400" y="3429000"/>
+            <a:ext cx="3520440" cy="1508760"/>
+          </a:xfrm>
+          <a:prstGeom prst="roundRect">
             <a:avLst/>
           </a:prstGeom>
           <a:solidFill>
-            <a:srgbClr val="EEF3FB"/>
+            <a:srgbClr val="FFFFFF"/>
           </a:solidFill>
-          <a:ln w="9525">
+          <a:ln w="12700">
             <a:solidFill>
               <a:srgbClr val="E3E8F0"/>
             </a:solidFill>
@@ -14678,22 +15317,22 @@
       </p:sp>
       <p:sp>
         <p:nvSpPr>
-          <p:cNvPr id="16" name="TextBox 15"/>
-          <p:cNvSpPr txBox="1"/>
-          <p:nvPr/>
-        </p:nvSpPr>
-        <p:spPr>
-          <a:xfrm>
-            <a:off x="777240" y="2779776"/>
-            <a:ext cx="2560320" cy="475488"/>
-          </a:xfrm>
-          <a:prstGeom prst="rect">
-            <a:avLst/>
-          </a:prstGeom>
-          <a:noFill/>
-        </p:spPr>
-        <p:txBody>
-          <a:bodyPr wrap="square" lIns="0" rIns="0" tIns="0" bIns="0" anchor="ctr">
+          <p:cNvPr id="20" name="TextBox 19"/>
+          <p:cNvSpPr txBox="1"/>
+          <p:nvPr/>
+        </p:nvSpPr>
+        <p:spPr>
+          <a:xfrm>
+            <a:off x="4544568" y="3611880"/>
+            <a:ext cx="3118104" cy="365760"/>
+          </a:xfrm>
+          <a:prstGeom prst="rect">
+            <a:avLst/>
+          </a:prstGeom>
+          <a:noFill/>
+        </p:spPr>
+        <p:txBody>
+          <a:bodyPr wrap="square" lIns="0" rIns="0" tIns="0" bIns="0" anchor="t">
             <a:spAutoFit/>
           </a:bodyPr>
           <a:lstStyle/>
@@ -14704,35 +15343,74 @@
               </a:lnSpc>
             </a:pPr>
             <a:r>
-              <a:rPr sz="1100" b="1">
-                <a:solidFill>
-                  <a:srgbClr val="12347A"/>
-                </a:solidFill>
-                <a:latin typeface="맑은 고딕"/>
-              </a:rPr>
-              <a:t>대표이사 직통</a:t>
-            </a:r>
-          </a:p>
-        </p:txBody>
-      </p:sp>
-      <p:sp>
-        <p:nvSpPr>
-          <p:cNvPr id="17" name="Rectangle 16"/>
+              <a:rPr sz="1350" b="1">
+                <a:solidFill>
+                  <a:srgbClr val="1A2230"/>
+                </a:solidFill>
+                <a:latin typeface="맑은 고딕"/>
+              </a:rPr>
+              <a:t>📈 견실한 재무</a:t>
+            </a:r>
+          </a:p>
+        </p:txBody>
+      </p:sp>
+      <p:sp>
+        <p:nvSpPr>
+          <p:cNvPr id="21" name="TextBox 20"/>
+          <p:cNvSpPr txBox="1"/>
+          <p:nvPr/>
+        </p:nvSpPr>
+        <p:spPr>
+          <a:xfrm>
+            <a:off x="4544568" y="3995928"/>
+            <a:ext cx="3118104" cy="777239"/>
+          </a:xfrm>
+          <a:prstGeom prst="rect">
+            <a:avLst/>
+          </a:prstGeom>
+          <a:noFill/>
+        </p:spPr>
+        <p:txBody>
+          <a:bodyPr wrap="square" lIns="0" rIns="0" tIns="0" bIns="0" anchor="t">
+            <a:spAutoFit/>
+          </a:bodyPr>
+          <a:lstStyle/>
+          <a:p>
+            <a:pPr algn="l">
+              <a:lnSpc>
+                <a:spcPct val="112000"/>
+              </a:lnSpc>
+            </a:pPr>
+            <a:r>
+              <a:rPr sz="1100" b="0">
+                <a:solidFill>
+                  <a:srgbClr val="5B6678"/>
+                </a:solidFill>
+                <a:latin typeface="맑은 고딕"/>
+              </a:rPr>
+              <a:t>매출 52억 · NICE D&amp;B 신용 BB · 현금흐름 A · 자본금 2억.</a:t>
+            </a:r>
+          </a:p>
+        </p:txBody>
+      </p:sp>
+      <p:sp>
+        <p:nvSpPr>
+          <p:cNvPr id="22" name="Rounded Rectangle 21"/>
           <p:cNvSpPr/>
           <p:nvPr/>
         </p:nvSpPr>
         <p:spPr>
           <a:xfrm>
-            <a:off x="3383280" y="2779776"/>
-            <a:ext cx="8183879" cy="475488"/>
-          </a:xfrm>
-          <a:prstGeom prst="rect">
+            <a:off x="8046720" y="3429000"/>
+            <a:ext cx="3520440" cy="1508760"/>
+          </a:xfrm>
+          <a:prstGeom prst="roundRect">
             <a:avLst/>
           </a:prstGeom>
           <a:solidFill>
             <a:srgbClr val="FFFFFF"/>
           </a:solidFill>
-          <a:ln w="9525">
+          <a:ln w="12700">
             <a:solidFill>
               <a:srgbClr val="E3E8F0"/>
             </a:solidFill>
@@ -14763,22 +15441,22 @@
       </p:sp>
       <p:sp>
         <p:nvSpPr>
-          <p:cNvPr id="18" name="TextBox 17"/>
-          <p:cNvSpPr txBox="1"/>
-          <p:nvPr/>
-        </p:nvSpPr>
-        <p:spPr>
-          <a:xfrm>
-            <a:off x="3547872" y="2779776"/>
-            <a:ext cx="7955279" cy="475488"/>
-          </a:xfrm>
-          <a:prstGeom prst="rect">
-            <a:avLst/>
-          </a:prstGeom>
-          <a:noFill/>
-        </p:spPr>
-        <p:txBody>
-          <a:bodyPr wrap="square" lIns="0" rIns="0" tIns="0" bIns="0" anchor="ctr">
+          <p:cNvPr id="23" name="TextBox 22"/>
+          <p:cNvSpPr txBox="1"/>
+          <p:nvPr/>
+        </p:nvSpPr>
+        <p:spPr>
+          <a:xfrm>
+            <a:off x="8247888" y="3611880"/>
+            <a:ext cx="3118104" cy="365760"/>
+          </a:xfrm>
+          <a:prstGeom prst="rect">
+            <a:avLst/>
+          </a:prstGeom>
+          <a:noFill/>
+        </p:spPr>
+        <p:txBody>
+          <a:bodyPr wrap="square" lIns="0" rIns="0" tIns="0" bIns="0" anchor="t">
             <a:spAutoFit/>
           </a:bodyPr>
           <a:lstStyle/>
@@ -14789,38 +15467,75 @@
               </a:lnSpc>
             </a:pPr>
             <a:r>
+              <a:rPr sz="1350" b="1">
+                <a:solidFill>
+                  <a:srgbClr val="1A2230"/>
+                </a:solidFill>
+                <a:latin typeface="맑은 고딕"/>
+              </a:rPr>
+              <a:t>🌐 전국 22개 지사</a:t>
+            </a:r>
+          </a:p>
+        </p:txBody>
+      </p:sp>
+      <p:sp>
+        <p:nvSpPr>
+          <p:cNvPr id="24" name="TextBox 23"/>
+          <p:cNvSpPr txBox="1"/>
+          <p:nvPr/>
+        </p:nvSpPr>
+        <p:spPr>
+          <a:xfrm>
+            <a:off x="8247888" y="3995928"/>
+            <a:ext cx="3118104" cy="777239"/>
+          </a:xfrm>
+          <a:prstGeom prst="rect">
+            <a:avLst/>
+          </a:prstGeom>
+          <a:noFill/>
+        </p:spPr>
+        <p:txBody>
+          <a:bodyPr wrap="square" lIns="0" rIns="0" tIns="0" bIns="0" anchor="t">
+            <a:spAutoFit/>
+          </a:bodyPr>
+          <a:lstStyle/>
+          <a:p>
+            <a:pPr algn="l">
+              <a:lnSpc>
+                <a:spcPct val="112000"/>
+              </a:lnSpc>
+            </a:pPr>
+            <a:r>
               <a:rPr sz="1100" b="0">
                 <a:solidFill>
-                  <a:srgbClr val="1A2230"/>
-                </a:solidFill>
-                <a:latin typeface="맑은 고딕"/>
-              </a:rPr>
-              <a:t>010-3345-6107</a:t>
-            </a:r>
-          </a:p>
-        </p:txBody>
-      </p:sp>
-      <p:sp>
-        <p:nvSpPr>
-          <p:cNvPr id="19" name="Rectangle 18"/>
+                  <a:srgbClr val="5B6678"/>
+                </a:solidFill>
+                <a:latin typeface="맑은 고딕"/>
+              </a:rPr>
+              <a:t>본사 울산 + 전국 22개 지사망으로 현장 대응·납기 안정.</a:t>
+            </a:r>
+          </a:p>
+        </p:txBody>
+      </p:sp>
+      <p:sp>
+        <p:nvSpPr>
+          <p:cNvPr id="25" name="Rounded Rectangle 24"/>
           <p:cNvSpPr/>
           <p:nvPr/>
         </p:nvSpPr>
         <p:spPr>
           <a:xfrm>
-            <a:off x="640080" y="3255264"/>
-            <a:ext cx="2743200" cy="475488"/>
-          </a:xfrm>
-          <a:prstGeom prst="rect">
+            <a:off x="640080" y="5257800"/>
+            <a:ext cx="10972800" cy="1234440"/>
+          </a:xfrm>
+          <a:prstGeom prst="roundRect">
             <a:avLst/>
           </a:prstGeom>
           <a:solidFill>
             <a:srgbClr val="EEF3FB"/>
           </a:solidFill>
-          <a:ln w="9525">
-            <a:solidFill>
-              <a:srgbClr val="E3E8F0"/>
-            </a:solidFill>
+          <a:ln>
+            <a:noFill/>
           </a:ln>
           <a:effectLst/>
         </p:spPr>
@@ -14848,22 +15563,22 @@
       </p:sp>
       <p:sp>
         <p:nvSpPr>
-          <p:cNvPr id="20" name="TextBox 19"/>
-          <p:cNvSpPr txBox="1"/>
-          <p:nvPr/>
-        </p:nvSpPr>
-        <p:spPr>
-          <a:xfrm>
-            <a:off x="777240" y="3255264"/>
-            <a:ext cx="2560320" cy="475488"/>
-          </a:xfrm>
-          <a:prstGeom prst="rect">
-            <a:avLst/>
-          </a:prstGeom>
-          <a:noFill/>
-        </p:spPr>
-        <p:txBody>
-          <a:bodyPr wrap="square" lIns="0" rIns="0" tIns="0" bIns="0" anchor="ctr">
+          <p:cNvPr id="26" name="TextBox 25"/>
+          <p:cNvSpPr txBox="1"/>
+          <p:nvPr/>
+        </p:nvSpPr>
+        <p:spPr>
+          <a:xfrm>
+            <a:off x="868680" y="5440680"/>
+            <a:ext cx="10515600" cy="320040"/>
+          </a:xfrm>
+          <a:prstGeom prst="rect">
+            <a:avLst/>
+          </a:prstGeom>
+          <a:noFill/>
+        </p:spPr>
+        <p:txBody>
+          <a:bodyPr wrap="square" lIns="0" rIns="0" tIns="0" bIns="0" anchor="t">
             <a:spAutoFit/>
           </a:bodyPr>
           <a:lstStyle/>
@@ -14874,429 +15589,68 @@
               </a:lnSpc>
             </a:pPr>
             <a:r>
-              <a:rPr sz="1100" b="1">
+              <a:rPr sz="1350" b="1">
                 <a:solidFill>
                   <a:srgbClr val="12347A"/>
                 </a:solidFill>
                 <a:latin typeface="맑은 고딕"/>
               </a:rPr>
-              <a:t>본사</a:t>
-            </a:r>
-          </a:p>
-        </p:txBody>
-      </p:sp>
-      <p:sp>
-        <p:nvSpPr>
-          <p:cNvPr id="21" name="Rectangle 20"/>
-          <p:cNvSpPr/>
-          <p:nvPr/>
-        </p:nvSpPr>
-        <p:spPr>
-          <a:xfrm>
-            <a:off x="3383280" y="3255264"/>
-            <a:ext cx="8183879" cy="475488"/>
-          </a:xfrm>
-          <a:prstGeom prst="rect">
-            <a:avLst/>
-          </a:prstGeom>
-          <a:solidFill>
-            <a:srgbClr val="FFFFFF"/>
-          </a:solidFill>
-          <a:ln w="9525">
-            <a:solidFill>
-              <a:srgbClr val="E3E8F0"/>
-            </a:solidFill>
-          </a:ln>
-          <a:effectLst/>
-        </p:spPr>
-        <p:style>
-          <a:lnRef idx="1">
-            <a:schemeClr val="accent1"/>
-          </a:lnRef>
-          <a:fillRef idx="3">
-            <a:schemeClr val="accent1"/>
-          </a:fillRef>
-          <a:effectRef idx="2">
-            <a:schemeClr val="accent1"/>
-          </a:effectRef>
-          <a:fontRef idx="minor">
-            <a:schemeClr val="lt1"/>
-          </a:fontRef>
-        </p:style>
-        <p:txBody>
-          <a:bodyPr rtlCol="0" anchor="ctr"/>
-          <a:lstStyle/>
-          <a:p>
-            <a:pPr algn="ctr"/>
-          </a:p>
-        </p:txBody>
-      </p:sp>
-      <p:sp>
-        <p:nvSpPr>
-          <p:cNvPr id="22" name="TextBox 21"/>
-          <p:cNvSpPr txBox="1"/>
-          <p:nvPr/>
-        </p:nvSpPr>
-        <p:spPr>
-          <a:xfrm>
-            <a:off x="3547872" y="3255264"/>
-            <a:ext cx="7955279" cy="475488"/>
-          </a:xfrm>
-          <a:prstGeom prst="rect">
-            <a:avLst/>
-          </a:prstGeom>
-          <a:noFill/>
-        </p:spPr>
-        <p:txBody>
-          <a:bodyPr wrap="square" lIns="0" rIns="0" tIns="0" bIns="0" anchor="ctr">
+              <a:t>건설사·시행사 협력 제안</a:t>
+            </a:r>
+          </a:p>
+        </p:txBody>
+      </p:sp>
+      <p:sp>
+        <p:nvSpPr>
+          <p:cNvPr id="27" name="TextBox 26"/>
+          <p:cNvSpPr txBox="1"/>
+          <p:nvPr/>
+        </p:nvSpPr>
+        <p:spPr>
+          <a:xfrm>
+            <a:off x="868680" y="5852160"/>
+            <a:ext cx="10515600" cy="594360"/>
+          </a:xfrm>
+          <a:prstGeom prst="rect">
+            <a:avLst/>
+          </a:prstGeom>
+          <a:noFill/>
+        </p:spPr>
+        <p:txBody>
+          <a:bodyPr wrap="square" lIns="0" rIns="0" tIns="0" bIns="0" anchor="t">
             <a:spAutoFit/>
           </a:bodyPr>
           <a:lstStyle/>
           <a:p>
             <a:pPr algn="l">
               <a:lnSpc>
-                <a:spcPct val="100000"/>
+                <a:spcPct val="125000"/>
               </a:lnSpc>
             </a:pPr>
             <a:r>
               <a:rPr sz="1100" b="0">
                 <a:solidFill>
-                  <a:srgbClr val="1A2230"/>
-                </a:solidFill>
-                <a:latin typeface="맑은 고딕"/>
-              </a:rPr>
-              <a:t>울산광역시 울주군 청량읍 상남1길 28, 2동 (전국 22개 지사)</a:t>
-            </a:r>
-          </a:p>
-        </p:txBody>
-      </p:sp>
-      <p:sp>
-        <p:nvSpPr>
-          <p:cNvPr id="23" name="Rectangle 22"/>
-          <p:cNvSpPr/>
-          <p:nvPr/>
-        </p:nvSpPr>
-        <p:spPr>
-          <a:xfrm>
-            <a:off x="640080" y="3730752"/>
-            <a:ext cx="2743200" cy="475488"/>
-          </a:xfrm>
-          <a:prstGeom prst="rect">
-            <a:avLst/>
-          </a:prstGeom>
-          <a:solidFill>
-            <a:srgbClr val="EEF3FB"/>
-          </a:solidFill>
-          <a:ln w="9525">
-            <a:solidFill>
-              <a:srgbClr val="E3E8F0"/>
-            </a:solidFill>
-          </a:ln>
-          <a:effectLst/>
-        </p:spPr>
-        <p:style>
-          <a:lnRef idx="1">
-            <a:schemeClr val="accent1"/>
-          </a:lnRef>
-          <a:fillRef idx="3">
-            <a:schemeClr val="accent1"/>
-          </a:fillRef>
-          <a:effectRef idx="2">
-            <a:schemeClr val="accent1"/>
-          </a:effectRef>
-          <a:fontRef idx="minor">
-            <a:schemeClr val="lt1"/>
-          </a:fontRef>
-        </p:style>
-        <p:txBody>
-          <a:bodyPr rtlCol="0" anchor="ctr"/>
-          <a:lstStyle/>
-          <a:p>
-            <a:pPr algn="ctr"/>
-          </a:p>
-        </p:txBody>
-      </p:sp>
-      <p:sp>
-        <p:nvSpPr>
-          <p:cNvPr id="24" name="TextBox 23"/>
-          <p:cNvSpPr txBox="1"/>
-          <p:nvPr/>
-        </p:nvSpPr>
-        <p:spPr>
-          <a:xfrm>
-            <a:off x="777240" y="3730752"/>
-            <a:ext cx="2560320" cy="475488"/>
-          </a:xfrm>
-          <a:prstGeom prst="rect">
-            <a:avLst/>
-          </a:prstGeom>
-          <a:noFill/>
-        </p:spPr>
-        <p:txBody>
-          <a:bodyPr wrap="square" lIns="0" rIns="0" tIns="0" bIns="0" anchor="ctr">
-            <a:spAutoFit/>
-          </a:bodyPr>
-          <a:lstStyle/>
+                  <a:srgbClr val="33404F"/>
+                </a:solidFill>
+                <a:latin typeface="맑은 고딕"/>
+              </a:rPr>
+              <a:t>✓ 단지 ACRO 스마트홈 빌트인/옵션 패키지   ✓ 실내·경관 조명 설계·시공·납품</a:t>
+            </a:r>
+          </a:p>
           <a:p>
             <a:pPr algn="l">
               <a:lnSpc>
-                <a:spcPct val="100000"/>
-              </a:lnSpc>
-            </a:pPr>
-            <a:r>
-              <a:rPr sz="1100" b="1">
-                <a:solidFill>
-                  <a:srgbClr val="12347A"/>
-                </a:solidFill>
-                <a:latin typeface="맑은 고딕"/>
-              </a:rPr>
-              <a:t>이메일/홈페이지</a:t>
-            </a:r>
-          </a:p>
-        </p:txBody>
-      </p:sp>
-      <p:sp>
-        <p:nvSpPr>
-          <p:cNvPr id="25" name="Rectangle 24"/>
-          <p:cNvSpPr/>
-          <p:nvPr/>
-        </p:nvSpPr>
-        <p:spPr>
-          <a:xfrm>
-            <a:off x="3383280" y="3730752"/>
-            <a:ext cx="8183879" cy="475488"/>
-          </a:xfrm>
-          <a:prstGeom prst="rect">
-            <a:avLst/>
-          </a:prstGeom>
-          <a:solidFill>
-            <a:srgbClr val="FFF7DA"/>
-          </a:solidFill>
-          <a:ln w="9525">
-            <a:solidFill>
-              <a:srgbClr val="E3E8F0"/>
-            </a:solidFill>
-          </a:ln>
-          <a:effectLst/>
-        </p:spPr>
-        <p:style>
-          <a:lnRef idx="1">
-            <a:schemeClr val="accent1"/>
-          </a:lnRef>
-          <a:fillRef idx="3">
-            <a:schemeClr val="accent1"/>
-          </a:fillRef>
-          <a:effectRef idx="2">
-            <a:schemeClr val="accent1"/>
-          </a:effectRef>
-          <a:fontRef idx="minor">
-            <a:schemeClr val="lt1"/>
-          </a:fontRef>
-        </p:style>
-        <p:txBody>
-          <a:bodyPr rtlCol="0" anchor="ctr"/>
-          <a:lstStyle/>
-          <a:p>
-            <a:pPr algn="ctr"/>
-          </a:p>
-        </p:txBody>
-      </p:sp>
-      <p:sp>
-        <p:nvSpPr>
-          <p:cNvPr id="26" name="TextBox 25"/>
-          <p:cNvSpPr txBox="1"/>
-          <p:nvPr/>
-        </p:nvSpPr>
-        <p:spPr>
-          <a:xfrm>
-            <a:off x="3547872" y="3730752"/>
-            <a:ext cx="7955279" cy="475488"/>
-          </a:xfrm>
-          <a:prstGeom prst="rect">
-            <a:avLst/>
-          </a:prstGeom>
-          <a:noFill/>
-        </p:spPr>
-        <p:txBody>
-          <a:bodyPr wrap="square" lIns="0" rIns="0" tIns="0" bIns="0" anchor="ctr">
-            <a:spAutoFit/>
-          </a:bodyPr>
-          <a:lstStyle/>
-          <a:p>
-            <a:pPr algn="l">
-              <a:lnSpc>
-                <a:spcPct val="100000"/>
+                <a:spcPct val="125000"/>
               </a:lnSpc>
             </a:pPr>
             <a:r>
               <a:rPr sz="1100" b="0">
                 <a:solidFill>
-                  <a:srgbClr val="7A5D00"/>
-                </a:solidFill>
-                <a:latin typeface="맑은 고딕"/>
-              </a:rPr>
-              <a:t>[ 회장 확정 ]</a:t>
-            </a:r>
-          </a:p>
-        </p:txBody>
-      </p:sp>
-      <p:sp>
-        <p:nvSpPr>
-          <p:cNvPr id="27" name="Rounded Rectangle 26"/>
-          <p:cNvSpPr/>
-          <p:nvPr/>
-        </p:nvSpPr>
-        <p:spPr>
-          <a:xfrm>
-            <a:off x="640080" y="4663440"/>
-            <a:ext cx="10972800" cy="1554480"/>
-          </a:xfrm>
-          <a:prstGeom prst="roundRect">
-            <a:avLst/>
-          </a:prstGeom>
-          <a:solidFill>
-            <a:srgbClr val="12347A"/>
-          </a:solidFill>
-          <a:ln>
-            <a:noFill/>
-          </a:ln>
-          <a:effectLst/>
-        </p:spPr>
-        <p:style>
-          <a:lnRef idx="1">
-            <a:schemeClr val="accent1"/>
-          </a:lnRef>
-          <a:fillRef idx="3">
-            <a:schemeClr val="accent1"/>
-          </a:fillRef>
-          <a:effectRef idx="2">
-            <a:schemeClr val="accent1"/>
-          </a:effectRef>
-          <a:fontRef idx="minor">
-            <a:schemeClr val="lt1"/>
-          </a:fontRef>
-        </p:style>
-        <p:txBody>
-          <a:bodyPr rtlCol="0" anchor="ctr"/>
-          <a:lstStyle/>
-          <a:p>
-            <a:pPr algn="ctr"/>
-          </a:p>
-        </p:txBody>
-      </p:sp>
-      <p:sp>
-        <p:nvSpPr>
-          <p:cNvPr id="28" name="TextBox 27"/>
-          <p:cNvSpPr txBox="1"/>
-          <p:nvPr/>
-        </p:nvSpPr>
-        <p:spPr>
-          <a:xfrm>
-            <a:off x="640080" y="4937760"/>
-            <a:ext cx="10972800" cy="365760"/>
-          </a:xfrm>
-          <a:prstGeom prst="rect">
-            <a:avLst/>
-          </a:prstGeom>
-          <a:noFill/>
-        </p:spPr>
-        <p:txBody>
-          <a:bodyPr wrap="square" lIns="0" rIns="0" tIns="0" bIns="0" anchor="t">
-            <a:spAutoFit/>
-          </a:bodyPr>
-          <a:lstStyle/>
-          <a:p>
-            <a:pPr algn="ctr">
-              <a:lnSpc>
-                <a:spcPct val="100000"/>
-              </a:lnSpc>
-            </a:pPr>
-            <a:r>
-              <a:rPr sz="1300" b="1">
-                <a:solidFill>
-                  <a:srgbClr val="CADCFC"/>
-                </a:solidFill>
-                <a:latin typeface="맑은 고딕"/>
-              </a:rPr>
-              <a:t>EDGE COMPANY CO., LTD.</a:t>
-            </a:r>
-          </a:p>
-        </p:txBody>
-      </p:sp>
-      <p:sp>
-        <p:nvSpPr>
-          <p:cNvPr id="29" name="TextBox 28"/>
-          <p:cNvSpPr txBox="1"/>
-          <p:nvPr/>
-        </p:nvSpPr>
-        <p:spPr>
-          <a:xfrm>
-            <a:off x="640080" y="5349240"/>
-            <a:ext cx="10972800" cy="457200"/>
-          </a:xfrm>
-          <a:prstGeom prst="rect">
-            <a:avLst/>
-          </a:prstGeom>
-          <a:noFill/>
-        </p:spPr>
-        <p:txBody>
-          <a:bodyPr wrap="square" lIns="0" rIns="0" tIns="0" bIns="0" anchor="t">
-            <a:spAutoFit/>
-          </a:bodyPr>
-          <a:lstStyle/>
-          <a:p>
-            <a:pPr algn="ctr">
-              <a:lnSpc>
-                <a:spcPct val="100000"/>
-              </a:lnSpc>
-            </a:pPr>
-            <a:r>
-              <a:rPr sz="2400" b="1">
-                <a:solidFill>
-                  <a:srgbClr val="FFFFFF"/>
-                </a:solidFill>
-                <a:latin typeface="맑은 고딕"/>
-              </a:rPr>
-              <a:t>㈜엣지컴퍼니</a:t>
-            </a:r>
-          </a:p>
-        </p:txBody>
-      </p:sp>
-      <p:sp>
-        <p:nvSpPr>
-          <p:cNvPr id="30" name="TextBox 29"/>
-          <p:cNvSpPr txBox="1"/>
-          <p:nvPr/>
-        </p:nvSpPr>
-        <p:spPr>
-          <a:xfrm>
-            <a:off x="640080" y="5897880"/>
-            <a:ext cx="10972800" cy="274320"/>
-          </a:xfrm>
-          <a:prstGeom prst="rect">
-            <a:avLst/>
-          </a:prstGeom>
-          <a:noFill/>
-        </p:spPr>
-        <p:txBody>
-          <a:bodyPr wrap="square" lIns="0" rIns="0" tIns="0" bIns="0" anchor="t">
-            <a:spAutoFit/>
-          </a:bodyPr>
-          <a:lstStyle/>
-          <a:p>
-            <a:pPr algn="ctr">
-              <a:lnSpc>
-                <a:spcPct val="100000"/>
-              </a:lnSpc>
-            </a:pPr>
-            <a:r>
-              <a:rPr sz="1150" b="0">
-                <a:solidFill>
-                  <a:srgbClr val="CADCFC"/>
-                </a:solidFill>
-                <a:latin typeface="맑은 고딕"/>
-              </a:rPr>
-              <a:t>ACRO 스마트홈 제품 제조·공급 · 스마트홈 시스템 개발 · 실내/경관 조명</a:t>
+                  <a:srgbClr val="33404F"/>
+                </a:solidFill>
+                <a:latin typeface="맑은 고딕"/>
+              </a:rPr>
+              <a:t>✓ 공동구매 제품 공급   ✓ 준공 후 장기 A/S 협약</a:t>
             </a:r>
           </a:p>
         </p:txBody>
@@ -16587,6 +16941,1249 @@
                 <a:latin typeface="맑은 고딕"/>
               </a:rPr>
               <a:t>주거·상업 실내조명 + 건물 외관 경관조명 설계·시공·납품.</a:t>
+            </a:r>
+          </a:p>
+        </p:txBody>
+      </p:sp>
+    </p:spTree>
+  </p:cSld>
+  <p:clrMapOvr>
+    <a:masterClrMapping/>
+  </p:clrMapOvr>
+</p:sld>
+</file>
+
+<file path=ppt/slides/slide20.xml><?xml version="1.0" encoding="utf-8"?>
+<p:sld xmlns:a="http://schemas.openxmlformats.org/drawingml/2006/main" xmlns:p="http://schemas.openxmlformats.org/presentationml/2006/main" xmlns:r="http://schemas.openxmlformats.org/officeDocument/2006/relationships">
+  <p:cSld>
+    <p:spTree>
+      <p:nvGrpSpPr>
+        <p:cNvPr id="1" name=""/>
+        <p:cNvGrpSpPr/>
+        <p:nvPr/>
+      </p:nvGrpSpPr>
+      <p:grpSpPr/>
+      <p:sp>
+        <p:nvSpPr>
+          <p:cNvPr id="2" name="Rectangle 1"/>
+          <p:cNvSpPr/>
+          <p:nvPr/>
+        </p:nvSpPr>
+        <p:spPr>
+          <a:xfrm>
+            <a:off x="0" y="0"/>
+            <a:ext cx="12191695" cy="146304"/>
+          </a:xfrm>
+          <a:prstGeom prst="rect">
+            <a:avLst/>
+          </a:prstGeom>
+          <a:solidFill>
+            <a:srgbClr val="12347A"/>
+          </a:solidFill>
+          <a:ln>
+            <a:noFill/>
+          </a:ln>
+          <a:effectLst/>
+        </p:spPr>
+        <p:style>
+          <a:lnRef idx="1">
+            <a:schemeClr val="accent1"/>
+          </a:lnRef>
+          <a:fillRef idx="3">
+            <a:schemeClr val="accent1"/>
+          </a:fillRef>
+          <a:effectRef idx="2">
+            <a:schemeClr val="accent1"/>
+          </a:effectRef>
+          <a:fontRef idx="minor">
+            <a:schemeClr val="lt1"/>
+          </a:fontRef>
+        </p:style>
+        <p:txBody>
+          <a:bodyPr rtlCol="0" anchor="ctr"/>
+          <a:lstStyle/>
+          <a:p>
+            <a:pPr algn="ctr"/>
+          </a:p>
+        </p:txBody>
+      </p:sp>
+      <p:sp>
+        <p:nvSpPr>
+          <p:cNvPr id="3" name="TextBox 2"/>
+          <p:cNvSpPr txBox="1"/>
+          <p:nvPr/>
+        </p:nvSpPr>
+        <p:spPr>
+          <a:xfrm>
+            <a:off x="640080" y="502920"/>
+            <a:ext cx="8229600" cy="365760"/>
+          </a:xfrm>
+          <a:prstGeom prst="rect">
+            <a:avLst/>
+          </a:prstGeom>
+          <a:noFill/>
+        </p:spPr>
+        <p:txBody>
+          <a:bodyPr wrap="square" lIns="0" rIns="0" tIns="0" bIns="0" anchor="t">
+            <a:spAutoFit/>
+          </a:bodyPr>
+          <a:lstStyle/>
+          <a:p>
+            <a:pPr algn="l">
+              <a:lnSpc>
+                <a:spcPct val="100000"/>
+              </a:lnSpc>
+            </a:pPr>
+            <a:r>
+              <a:rPr sz="1600" b="1">
+                <a:solidFill>
+                  <a:srgbClr val="1F6FEB"/>
+                </a:solidFill>
+                <a:latin typeface="맑은 고딕"/>
+              </a:rPr>
+              <a:t>16  </a:t>
+            </a:r>
+            <a:r>
+              <a:rPr sz="2600" b="1">
+                <a:solidFill>
+                  <a:srgbClr val="1A2230"/>
+                </a:solidFill>
+                <a:latin typeface="맑은 고딕"/>
+              </a:rPr>
+              <a:t>연락처</a:t>
+            </a:r>
+          </a:p>
+        </p:txBody>
+      </p:sp>
+      <p:sp>
+        <p:nvSpPr>
+          <p:cNvPr id="4" name="TextBox 3"/>
+          <p:cNvSpPr txBox="1"/>
+          <p:nvPr/>
+        </p:nvSpPr>
+        <p:spPr>
+          <a:xfrm>
+            <a:off x="658368" y="1024128"/>
+            <a:ext cx="8229600" cy="274320"/>
+          </a:xfrm>
+          <a:prstGeom prst="rect">
+            <a:avLst/>
+          </a:prstGeom>
+          <a:noFill/>
+        </p:spPr>
+        <p:txBody>
+          <a:bodyPr wrap="square" lIns="0" rIns="0" tIns="0" bIns="0" anchor="t">
+            <a:spAutoFit/>
+          </a:bodyPr>
+          <a:lstStyle/>
+          <a:p>
+            <a:pPr algn="l">
+              <a:lnSpc>
+                <a:spcPct val="100000"/>
+              </a:lnSpc>
+            </a:pPr>
+            <a:r>
+              <a:rPr sz="1100" b="1">
+                <a:solidFill>
+                  <a:srgbClr val="AEB7C6"/>
+                </a:solidFill>
+                <a:latin typeface="맑은 고딕"/>
+              </a:rPr>
+              <a:t>Contact</a:t>
+            </a:r>
+          </a:p>
+        </p:txBody>
+      </p:sp>
+      <p:sp>
+        <p:nvSpPr>
+          <p:cNvPr id="5" name="Rectangle 4"/>
+          <p:cNvSpPr/>
+          <p:nvPr/>
+        </p:nvSpPr>
+        <p:spPr>
+          <a:xfrm>
+            <a:off x="658368" y="1371600"/>
+            <a:ext cx="566928" cy="41148"/>
+          </a:xfrm>
+          <a:prstGeom prst="rect">
+            <a:avLst/>
+          </a:prstGeom>
+          <a:solidFill>
+            <a:srgbClr val="1F6FEB"/>
+          </a:solidFill>
+          <a:ln>
+            <a:noFill/>
+          </a:ln>
+          <a:effectLst/>
+        </p:spPr>
+        <p:style>
+          <a:lnRef idx="1">
+            <a:schemeClr val="accent1"/>
+          </a:lnRef>
+          <a:fillRef idx="3">
+            <a:schemeClr val="accent1"/>
+          </a:fillRef>
+          <a:effectRef idx="2">
+            <a:schemeClr val="accent1"/>
+          </a:effectRef>
+          <a:fontRef idx="minor">
+            <a:schemeClr val="lt1"/>
+          </a:fontRef>
+        </p:style>
+        <p:txBody>
+          <a:bodyPr rtlCol="0" anchor="ctr"/>
+          <a:lstStyle/>
+          <a:p>
+            <a:pPr algn="ctr"/>
+          </a:p>
+        </p:txBody>
+      </p:sp>
+      <p:sp>
+        <p:nvSpPr>
+          <p:cNvPr id="6" name="TextBox 5"/>
+          <p:cNvSpPr txBox="1"/>
+          <p:nvPr/>
+        </p:nvSpPr>
+        <p:spPr>
+          <a:xfrm>
+            <a:off x="7894015" y="548640"/>
+            <a:ext cx="3657600" cy="274320"/>
+          </a:xfrm>
+          <a:prstGeom prst="rect">
+            <a:avLst/>
+          </a:prstGeom>
+          <a:noFill/>
+        </p:spPr>
+        <p:txBody>
+          <a:bodyPr wrap="square" lIns="0" rIns="0" tIns="0" bIns="0" anchor="t">
+            <a:spAutoFit/>
+          </a:bodyPr>
+          <a:lstStyle/>
+          <a:p>
+            <a:pPr algn="r">
+              <a:lnSpc>
+                <a:spcPct val="100000"/>
+              </a:lnSpc>
+            </a:pPr>
+            <a:r>
+              <a:rPr sz="1000" b="1">
+                <a:solidFill>
+                  <a:srgbClr val="5B6678"/>
+                </a:solidFill>
+                <a:latin typeface="맑은 고딕"/>
+              </a:rPr>
+              <a:t>㈜엣지컴퍼니  |  지명원</a:t>
+            </a:r>
+          </a:p>
+        </p:txBody>
+      </p:sp>
+      <p:sp>
+        <p:nvSpPr>
+          <p:cNvPr id="7" name="Rectangle 6"/>
+          <p:cNvSpPr/>
+          <p:nvPr/>
+        </p:nvSpPr>
+        <p:spPr>
+          <a:xfrm>
+            <a:off x="640080" y="1828800"/>
+            <a:ext cx="2743200" cy="475488"/>
+          </a:xfrm>
+          <a:prstGeom prst="rect">
+            <a:avLst/>
+          </a:prstGeom>
+          <a:solidFill>
+            <a:srgbClr val="EEF3FB"/>
+          </a:solidFill>
+          <a:ln w="9525">
+            <a:solidFill>
+              <a:srgbClr val="E3E8F0"/>
+            </a:solidFill>
+          </a:ln>
+          <a:effectLst/>
+        </p:spPr>
+        <p:style>
+          <a:lnRef idx="1">
+            <a:schemeClr val="accent1"/>
+          </a:lnRef>
+          <a:fillRef idx="3">
+            <a:schemeClr val="accent1"/>
+          </a:fillRef>
+          <a:effectRef idx="2">
+            <a:schemeClr val="accent1"/>
+          </a:effectRef>
+          <a:fontRef idx="minor">
+            <a:schemeClr val="lt1"/>
+          </a:fontRef>
+        </p:style>
+        <p:txBody>
+          <a:bodyPr rtlCol="0" anchor="ctr"/>
+          <a:lstStyle/>
+          <a:p>
+            <a:pPr algn="ctr"/>
+          </a:p>
+        </p:txBody>
+      </p:sp>
+      <p:sp>
+        <p:nvSpPr>
+          <p:cNvPr id="8" name="TextBox 7"/>
+          <p:cNvSpPr txBox="1"/>
+          <p:nvPr/>
+        </p:nvSpPr>
+        <p:spPr>
+          <a:xfrm>
+            <a:off x="777240" y="1828800"/>
+            <a:ext cx="2560320" cy="475488"/>
+          </a:xfrm>
+          <a:prstGeom prst="rect">
+            <a:avLst/>
+          </a:prstGeom>
+          <a:noFill/>
+        </p:spPr>
+        <p:txBody>
+          <a:bodyPr wrap="square" lIns="0" rIns="0" tIns="0" bIns="0" anchor="ctr">
+            <a:spAutoFit/>
+          </a:bodyPr>
+          <a:lstStyle/>
+          <a:p>
+            <a:pPr algn="l">
+              <a:lnSpc>
+                <a:spcPct val="100000"/>
+              </a:lnSpc>
+            </a:pPr>
+            <a:r>
+              <a:rPr sz="1100" b="1">
+                <a:solidFill>
+                  <a:srgbClr val="12347A"/>
+                </a:solidFill>
+                <a:latin typeface="맑은 고딕"/>
+              </a:rPr>
+              <a:t>대표이사</a:t>
+            </a:r>
+          </a:p>
+        </p:txBody>
+      </p:sp>
+      <p:sp>
+        <p:nvSpPr>
+          <p:cNvPr id="9" name="Rectangle 8"/>
+          <p:cNvSpPr/>
+          <p:nvPr/>
+        </p:nvSpPr>
+        <p:spPr>
+          <a:xfrm>
+            <a:off x="3383280" y="1828800"/>
+            <a:ext cx="8183879" cy="475488"/>
+          </a:xfrm>
+          <a:prstGeom prst="rect">
+            <a:avLst/>
+          </a:prstGeom>
+          <a:solidFill>
+            <a:srgbClr val="FFFFFF"/>
+          </a:solidFill>
+          <a:ln w="9525">
+            <a:solidFill>
+              <a:srgbClr val="E3E8F0"/>
+            </a:solidFill>
+          </a:ln>
+          <a:effectLst/>
+        </p:spPr>
+        <p:style>
+          <a:lnRef idx="1">
+            <a:schemeClr val="accent1"/>
+          </a:lnRef>
+          <a:fillRef idx="3">
+            <a:schemeClr val="accent1"/>
+          </a:fillRef>
+          <a:effectRef idx="2">
+            <a:schemeClr val="accent1"/>
+          </a:effectRef>
+          <a:fontRef idx="minor">
+            <a:schemeClr val="lt1"/>
+          </a:fontRef>
+        </p:style>
+        <p:txBody>
+          <a:bodyPr rtlCol="0" anchor="ctr"/>
+          <a:lstStyle/>
+          <a:p>
+            <a:pPr algn="ctr"/>
+          </a:p>
+        </p:txBody>
+      </p:sp>
+      <p:sp>
+        <p:nvSpPr>
+          <p:cNvPr id="10" name="TextBox 9"/>
+          <p:cNvSpPr txBox="1"/>
+          <p:nvPr/>
+        </p:nvSpPr>
+        <p:spPr>
+          <a:xfrm>
+            <a:off x="3547872" y="1828800"/>
+            <a:ext cx="7955279" cy="475488"/>
+          </a:xfrm>
+          <a:prstGeom prst="rect">
+            <a:avLst/>
+          </a:prstGeom>
+          <a:noFill/>
+        </p:spPr>
+        <p:txBody>
+          <a:bodyPr wrap="square" lIns="0" rIns="0" tIns="0" bIns="0" anchor="ctr">
+            <a:spAutoFit/>
+          </a:bodyPr>
+          <a:lstStyle/>
+          <a:p>
+            <a:pPr algn="l">
+              <a:lnSpc>
+                <a:spcPct val="100000"/>
+              </a:lnSpc>
+            </a:pPr>
+            <a:r>
+              <a:rPr sz="1100" b="0">
+                <a:solidFill>
+                  <a:srgbClr val="1A2230"/>
+                </a:solidFill>
+                <a:latin typeface="맑은 고딕"/>
+              </a:rPr>
+              <a:t>고진식</a:t>
+            </a:r>
+          </a:p>
+        </p:txBody>
+      </p:sp>
+      <p:sp>
+        <p:nvSpPr>
+          <p:cNvPr id="11" name="Rectangle 10"/>
+          <p:cNvSpPr/>
+          <p:nvPr/>
+        </p:nvSpPr>
+        <p:spPr>
+          <a:xfrm>
+            <a:off x="640080" y="2304288"/>
+            <a:ext cx="2743200" cy="475488"/>
+          </a:xfrm>
+          <a:prstGeom prst="rect">
+            <a:avLst/>
+          </a:prstGeom>
+          <a:solidFill>
+            <a:srgbClr val="EEF3FB"/>
+          </a:solidFill>
+          <a:ln w="9525">
+            <a:solidFill>
+              <a:srgbClr val="E3E8F0"/>
+            </a:solidFill>
+          </a:ln>
+          <a:effectLst/>
+        </p:spPr>
+        <p:style>
+          <a:lnRef idx="1">
+            <a:schemeClr val="accent1"/>
+          </a:lnRef>
+          <a:fillRef idx="3">
+            <a:schemeClr val="accent1"/>
+          </a:fillRef>
+          <a:effectRef idx="2">
+            <a:schemeClr val="accent1"/>
+          </a:effectRef>
+          <a:fontRef idx="minor">
+            <a:schemeClr val="lt1"/>
+          </a:fontRef>
+        </p:style>
+        <p:txBody>
+          <a:bodyPr rtlCol="0" anchor="ctr"/>
+          <a:lstStyle/>
+          <a:p>
+            <a:pPr algn="ctr"/>
+          </a:p>
+        </p:txBody>
+      </p:sp>
+      <p:sp>
+        <p:nvSpPr>
+          <p:cNvPr id="12" name="TextBox 11"/>
+          <p:cNvSpPr txBox="1"/>
+          <p:nvPr/>
+        </p:nvSpPr>
+        <p:spPr>
+          <a:xfrm>
+            <a:off x="777240" y="2304288"/>
+            <a:ext cx="2560320" cy="475488"/>
+          </a:xfrm>
+          <a:prstGeom prst="rect">
+            <a:avLst/>
+          </a:prstGeom>
+          <a:noFill/>
+        </p:spPr>
+        <p:txBody>
+          <a:bodyPr wrap="square" lIns="0" rIns="0" tIns="0" bIns="0" anchor="ctr">
+            <a:spAutoFit/>
+          </a:bodyPr>
+          <a:lstStyle/>
+          <a:p>
+            <a:pPr algn="l">
+              <a:lnSpc>
+                <a:spcPct val="100000"/>
+              </a:lnSpc>
+            </a:pPr>
+            <a:r>
+              <a:rPr sz="1100" b="1">
+                <a:solidFill>
+                  <a:srgbClr val="12347A"/>
+                </a:solidFill>
+                <a:latin typeface="맑은 고딕"/>
+              </a:rPr>
+              <a:t>대표번호</a:t>
+            </a:r>
+          </a:p>
+        </p:txBody>
+      </p:sp>
+      <p:sp>
+        <p:nvSpPr>
+          <p:cNvPr id="13" name="Rectangle 12"/>
+          <p:cNvSpPr/>
+          <p:nvPr/>
+        </p:nvSpPr>
+        <p:spPr>
+          <a:xfrm>
+            <a:off x="3383280" y="2304288"/>
+            <a:ext cx="8183879" cy="475488"/>
+          </a:xfrm>
+          <a:prstGeom prst="rect">
+            <a:avLst/>
+          </a:prstGeom>
+          <a:solidFill>
+            <a:srgbClr val="FFFFFF"/>
+          </a:solidFill>
+          <a:ln w="9525">
+            <a:solidFill>
+              <a:srgbClr val="E3E8F0"/>
+            </a:solidFill>
+          </a:ln>
+          <a:effectLst/>
+        </p:spPr>
+        <p:style>
+          <a:lnRef idx="1">
+            <a:schemeClr val="accent1"/>
+          </a:lnRef>
+          <a:fillRef idx="3">
+            <a:schemeClr val="accent1"/>
+          </a:fillRef>
+          <a:effectRef idx="2">
+            <a:schemeClr val="accent1"/>
+          </a:effectRef>
+          <a:fontRef idx="minor">
+            <a:schemeClr val="lt1"/>
+          </a:fontRef>
+        </p:style>
+        <p:txBody>
+          <a:bodyPr rtlCol="0" anchor="ctr"/>
+          <a:lstStyle/>
+          <a:p>
+            <a:pPr algn="ctr"/>
+          </a:p>
+        </p:txBody>
+      </p:sp>
+      <p:sp>
+        <p:nvSpPr>
+          <p:cNvPr id="14" name="TextBox 13"/>
+          <p:cNvSpPr txBox="1"/>
+          <p:nvPr/>
+        </p:nvSpPr>
+        <p:spPr>
+          <a:xfrm>
+            <a:off x="3547872" y="2304288"/>
+            <a:ext cx="7955279" cy="475488"/>
+          </a:xfrm>
+          <a:prstGeom prst="rect">
+            <a:avLst/>
+          </a:prstGeom>
+          <a:noFill/>
+        </p:spPr>
+        <p:txBody>
+          <a:bodyPr wrap="square" lIns="0" rIns="0" tIns="0" bIns="0" anchor="ctr">
+            <a:spAutoFit/>
+          </a:bodyPr>
+          <a:lstStyle/>
+          <a:p>
+            <a:pPr algn="l">
+              <a:lnSpc>
+                <a:spcPct val="100000"/>
+              </a:lnSpc>
+            </a:pPr>
+            <a:r>
+              <a:rPr sz="1100" b="0">
+                <a:solidFill>
+                  <a:srgbClr val="1A2230"/>
+                </a:solidFill>
+                <a:latin typeface="맑은 고딕"/>
+              </a:rPr>
+              <a:t>1533-3210</a:t>
+            </a:r>
+          </a:p>
+        </p:txBody>
+      </p:sp>
+      <p:sp>
+        <p:nvSpPr>
+          <p:cNvPr id="15" name="Rectangle 14"/>
+          <p:cNvSpPr/>
+          <p:nvPr/>
+        </p:nvSpPr>
+        <p:spPr>
+          <a:xfrm>
+            <a:off x="640080" y="2779776"/>
+            <a:ext cx="2743200" cy="475488"/>
+          </a:xfrm>
+          <a:prstGeom prst="rect">
+            <a:avLst/>
+          </a:prstGeom>
+          <a:solidFill>
+            <a:srgbClr val="EEF3FB"/>
+          </a:solidFill>
+          <a:ln w="9525">
+            <a:solidFill>
+              <a:srgbClr val="E3E8F0"/>
+            </a:solidFill>
+          </a:ln>
+          <a:effectLst/>
+        </p:spPr>
+        <p:style>
+          <a:lnRef idx="1">
+            <a:schemeClr val="accent1"/>
+          </a:lnRef>
+          <a:fillRef idx="3">
+            <a:schemeClr val="accent1"/>
+          </a:fillRef>
+          <a:effectRef idx="2">
+            <a:schemeClr val="accent1"/>
+          </a:effectRef>
+          <a:fontRef idx="minor">
+            <a:schemeClr val="lt1"/>
+          </a:fontRef>
+        </p:style>
+        <p:txBody>
+          <a:bodyPr rtlCol="0" anchor="ctr"/>
+          <a:lstStyle/>
+          <a:p>
+            <a:pPr algn="ctr"/>
+          </a:p>
+        </p:txBody>
+      </p:sp>
+      <p:sp>
+        <p:nvSpPr>
+          <p:cNvPr id="16" name="TextBox 15"/>
+          <p:cNvSpPr txBox="1"/>
+          <p:nvPr/>
+        </p:nvSpPr>
+        <p:spPr>
+          <a:xfrm>
+            <a:off x="777240" y="2779776"/>
+            <a:ext cx="2560320" cy="475488"/>
+          </a:xfrm>
+          <a:prstGeom prst="rect">
+            <a:avLst/>
+          </a:prstGeom>
+          <a:noFill/>
+        </p:spPr>
+        <p:txBody>
+          <a:bodyPr wrap="square" lIns="0" rIns="0" tIns="0" bIns="0" anchor="ctr">
+            <a:spAutoFit/>
+          </a:bodyPr>
+          <a:lstStyle/>
+          <a:p>
+            <a:pPr algn="l">
+              <a:lnSpc>
+                <a:spcPct val="100000"/>
+              </a:lnSpc>
+            </a:pPr>
+            <a:r>
+              <a:rPr sz="1100" b="1">
+                <a:solidFill>
+                  <a:srgbClr val="12347A"/>
+                </a:solidFill>
+                <a:latin typeface="맑은 고딕"/>
+              </a:rPr>
+              <a:t>대표이사 직통</a:t>
+            </a:r>
+          </a:p>
+        </p:txBody>
+      </p:sp>
+      <p:sp>
+        <p:nvSpPr>
+          <p:cNvPr id="17" name="Rectangle 16"/>
+          <p:cNvSpPr/>
+          <p:nvPr/>
+        </p:nvSpPr>
+        <p:spPr>
+          <a:xfrm>
+            <a:off x="3383280" y="2779776"/>
+            <a:ext cx="8183879" cy="475488"/>
+          </a:xfrm>
+          <a:prstGeom prst="rect">
+            <a:avLst/>
+          </a:prstGeom>
+          <a:solidFill>
+            <a:srgbClr val="FFFFFF"/>
+          </a:solidFill>
+          <a:ln w="9525">
+            <a:solidFill>
+              <a:srgbClr val="E3E8F0"/>
+            </a:solidFill>
+          </a:ln>
+          <a:effectLst/>
+        </p:spPr>
+        <p:style>
+          <a:lnRef idx="1">
+            <a:schemeClr val="accent1"/>
+          </a:lnRef>
+          <a:fillRef idx="3">
+            <a:schemeClr val="accent1"/>
+          </a:fillRef>
+          <a:effectRef idx="2">
+            <a:schemeClr val="accent1"/>
+          </a:effectRef>
+          <a:fontRef idx="minor">
+            <a:schemeClr val="lt1"/>
+          </a:fontRef>
+        </p:style>
+        <p:txBody>
+          <a:bodyPr rtlCol="0" anchor="ctr"/>
+          <a:lstStyle/>
+          <a:p>
+            <a:pPr algn="ctr"/>
+          </a:p>
+        </p:txBody>
+      </p:sp>
+      <p:sp>
+        <p:nvSpPr>
+          <p:cNvPr id="18" name="TextBox 17"/>
+          <p:cNvSpPr txBox="1"/>
+          <p:nvPr/>
+        </p:nvSpPr>
+        <p:spPr>
+          <a:xfrm>
+            <a:off x="3547872" y="2779776"/>
+            <a:ext cx="7955279" cy="475488"/>
+          </a:xfrm>
+          <a:prstGeom prst="rect">
+            <a:avLst/>
+          </a:prstGeom>
+          <a:noFill/>
+        </p:spPr>
+        <p:txBody>
+          <a:bodyPr wrap="square" lIns="0" rIns="0" tIns="0" bIns="0" anchor="ctr">
+            <a:spAutoFit/>
+          </a:bodyPr>
+          <a:lstStyle/>
+          <a:p>
+            <a:pPr algn="l">
+              <a:lnSpc>
+                <a:spcPct val="100000"/>
+              </a:lnSpc>
+            </a:pPr>
+            <a:r>
+              <a:rPr sz="1100" b="0">
+                <a:solidFill>
+                  <a:srgbClr val="1A2230"/>
+                </a:solidFill>
+                <a:latin typeface="맑은 고딕"/>
+              </a:rPr>
+              <a:t>010-3345-6107</a:t>
+            </a:r>
+          </a:p>
+        </p:txBody>
+      </p:sp>
+      <p:sp>
+        <p:nvSpPr>
+          <p:cNvPr id="19" name="Rectangle 18"/>
+          <p:cNvSpPr/>
+          <p:nvPr/>
+        </p:nvSpPr>
+        <p:spPr>
+          <a:xfrm>
+            <a:off x="640080" y="3255264"/>
+            <a:ext cx="2743200" cy="475488"/>
+          </a:xfrm>
+          <a:prstGeom prst="rect">
+            <a:avLst/>
+          </a:prstGeom>
+          <a:solidFill>
+            <a:srgbClr val="EEF3FB"/>
+          </a:solidFill>
+          <a:ln w="9525">
+            <a:solidFill>
+              <a:srgbClr val="E3E8F0"/>
+            </a:solidFill>
+          </a:ln>
+          <a:effectLst/>
+        </p:spPr>
+        <p:style>
+          <a:lnRef idx="1">
+            <a:schemeClr val="accent1"/>
+          </a:lnRef>
+          <a:fillRef idx="3">
+            <a:schemeClr val="accent1"/>
+          </a:fillRef>
+          <a:effectRef idx="2">
+            <a:schemeClr val="accent1"/>
+          </a:effectRef>
+          <a:fontRef idx="minor">
+            <a:schemeClr val="lt1"/>
+          </a:fontRef>
+        </p:style>
+        <p:txBody>
+          <a:bodyPr rtlCol="0" anchor="ctr"/>
+          <a:lstStyle/>
+          <a:p>
+            <a:pPr algn="ctr"/>
+          </a:p>
+        </p:txBody>
+      </p:sp>
+      <p:sp>
+        <p:nvSpPr>
+          <p:cNvPr id="20" name="TextBox 19"/>
+          <p:cNvSpPr txBox="1"/>
+          <p:nvPr/>
+        </p:nvSpPr>
+        <p:spPr>
+          <a:xfrm>
+            <a:off x="777240" y="3255264"/>
+            <a:ext cx="2560320" cy="475488"/>
+          </a:xfrm>
+          <a:prstGeom prst="rect">
+            <a:avLst/>
+          </a:prstGeom>
+          <a:noFill/>
+        </p:spPr>
+        <p:txBody>
+          <a:bodyPr wrap="square" lIns="0" rIns="0" tIns="0" bIns="0" anchor="ctr">
+            <a:spAutoFit/>
+          </a:bodyPr>
+          <a:lstStyle/>
+          <a:p>
+            <a:pPr algn="l">
+              <a:lnSpc>
+                <a:spcPct val="100000"/>
+              </a:lnSpc>
+            </a:pPr>
+            <a:r>
+              <a:rPr sz="1100" b="1">
+                <a:solidFill>
+                  <a:srgbClr val="12347A"/>
+                </a:solidFill>
+                <a:latin typeface="맑은 고딕"/>
+              </a:rPr>
+              <a:t>본사</a:t>
+            </a:r>
+          </a:p>
+        </p:txBody>
+      </p:sp>
+      <p:sp>
+        <p:nvSpPr>
+          <p:cNvPr id="21" name="Rectangle 20"/>
+          <p:cNvSpPr/>
+          <p:nvPr/>
+        </p:nvSpPr>
+        <p:spPr>
+          <a:xfrm>
+            <a:off x="3383280" y="3255264"/>
+            <a:ext cx="8183879" cy="475488"/>
+          </a:xfrm>
+          <a:prstGeom prst="rect">
+            <a:avLst/>
+          </a:prstGeom>
+          <a:solidFill>
+            <a:srgbClr val="FFFFFF"/>
+          </a:solidFill>
+          <a:ln w="9525">
+            <a:solidFill>
+              <a:srgbClr val="E3E8F0"/>
+            </a:solidFill>
+          </a:ln>
+          <a:effectLst/>
+        </p:spPr>
+        <p:style>
+          <a:lnRef idx="1">
+            <a:schemeClr val="accent1"/>
+          </a:lnRef>
+          <a:fillRef idx="3">
+            <a:schemeClr val="accent1"/>
+          </a:fillRef>
+          <a:effectRef idx="2">
+            <a:schemeClr val="accent1"/>
+          </a:effectRef>
+          <a:fontRef idx="minor">
+            <a:schemeClr val="lt1"/>
+          </a:fontRef>
+        </p:style>
+        <p:txBody>
+          <a:bodyPr rtlCol="0" anchor="ctr"/>
+          <a:lstStyle/>
+          <a:p>
+            <a:pPr algn="ctr"/>
+          </a:p>
+        </p:txBody>
+      </p:sp>
+      <p:sp>
+        <p:nvSpPr>
+          <p:cNvPr id="22" name="TextBox 21"/>
+          <p:cNvSpPr txBox="1"/>
+          <p:nvPr/>
+        </p:nvSpPr>
+        <p:spPr>
+          <a:xfrm>
+            <a:off x="3547872" y="3255264"/>
+            <a:ext cx="7955279" cy="475488"/>
+          </a:xfrm>
+          <a:prstGeom prst="rect">
+            <a:avLst/>
+          </a:prstGeom>
+          <a:noFill/>
+        </p:spPr>
+        <p:txBody>
+          <a:bodyPr wrap="square" lIns="0" rIns="0" tIns="0" bIns="0" anchor="ctr">
+            <a:spAutoFit/>
+          </a:bodyPr>
+          <a:lstStyle/>
+          <a:p>
+            <a:pPr algn="l">
+              <a:lnSpc>
+                <a:spcPct val="100000"/>
+              </a:lnSpc>
+            </a:pPr>
+            <a:r>
+              <a:rPr sz="1100" b="0">
+                <a:solidFill>
+                  <a:srgbClr val="1A2230"/>
+                </a:solidFill>
+                <a:latin typeface="맑은 고딕"/>
+              </a:rPr>
+              <a:t>울산광역시 울주군 청량읍 상남1길 28, 2동 (전국 22개 지사)</a:t>
+            </a:r>
+          </a:p>
+        </p:txBody>
+      </p:sp>
+      <p:sp>
+        <p:nvSpPr>
+          <p:cNvPr id="23" name="Rectangle 22"/>
+          <p:cNvSpPr/>
+          <p:nvPr/>
+        </p:nvSpPr>
+        <p:spPr>
+          <a:xfrm>
+            <a:off x="640080" y="3730752"/>
+            <a:ext cx="2743200" cy="475488"/>
+          </a:xfrm>
+          <a:prstGeom prst="rect">
+            <a:avLst/>
+          </a:prstGeom>
+          <a:solidFill>
+            <a:srgbClr val="EEF3FB"/>
+          </a:solidFill>
+          <a:ln w="9525">
+            <a:solidFill>
+              <a:srgbClr val="E3E8F0"/>
+            </a:solidFill>
+          </a:ln>
+          <a:effectLst/>
+        </p:spPr>
+        <p:style>
+          <a:lnRef idx="1">
+            <a:schemeClr val="accent1"/>
+          </a:lnRef>
+          <a:fillRef idx="3">
+            <a:schemeClr val="accent1"/>
+          </a:fillRef>
+          <a:effectRef idx="2">
+            <a:schemeClr val="accent1"/>
+          </a:effectRef>
+          <a:fontRef idx="minor">
+            <a:schemeClr val="lt1"/>
+          </a:fontRef>
+        </p:style>
+        <p:txBody>
+          <a:bodyPr rtlCol="0" anchor="ctr"/>
+          <a:lstStyle/>
+          <a:p>
+            <a:pPr algn="ctr"/>
+          </a:p>
+        </p:txBody>
+      </p:sp>
+      <p:sp>
+        <p:nvSpPr>
+          <p:cNvPr id="24" name="TextBox 23"/>
+          <p:cNvSpPr txBox="1"/>
+          <p:nvPr/>
+        </p:nvSpPr>
+        <p:spPr>
+          <a:xfrm>
+            <a:off x="777240" y="3730752"/>
+            <a:ext cx="2560320" cy="475488"/>
+          </a:xfrm>
+          <a:prstGeom prst="rect">
+            <a:avLst/>
+          </a:prstGeom>
+          <a:noFill/>
+        </p:spPr>
+        <p:txBody>
+          <a:bodyPr wrap="square" lIns="0" rIns="0" tIns="0" bIns="0" anchor="ctr">
+            <a:spAutoFit/>
+          </a:bodyPr>
+          <a:lstStyle/>
+          <a:p>
+            <a:pPr algn="l">
+              <a:lnSpc>
+                <a:spcPct val="100000"/>
+              </a:lnSpc>
+            </a:pPr>
+            <a:r>
+              <a:rPr sz="1100" b="1">
+                <a:solidFill>
+                  <a:srgbClr val="12347A"/>
+                </a:solidFill>
+                <a:latin typeface="맑은 고딕"/>
+              </a:rPr>
+              <a:t>이메일/홈페이지</a:t>
+            </a:r>
+          </a:p>
+        </p:txBody>
+      </p:sp>
+      <p:sp>
+        <p:nvSpPr>
+          <p:cNvPr id="25" name="Rectangle 24"/>
+          <p:cNvSpPr/>
+          <p:nvPr/>
+        </p:nvSpPr>
+        <p:spPr>
+          <a:xfrm>
+            <a:off x="3383280" y="3730752"/>
+            <a:ext cx="8183879" cy="475488"/>
+          </a:xfrm>
+          <a:prstGeom prst="rect">
+            <a:avLst/>
+          </a:prstGeom>
+          <a:solidFill>
+            <a:srgbClr val="FFF7DA"/>
+          </a:solidFill>
+          <a:ln w="9525">
+            <a:solidFill>
+              <a:srgbClr val="E3E8F0"/>
+            </a:solidFill>
+          </a:ln>
+          <a:effectLst/>
+        </p:spPr>
+        <p:style>
+          <a:lnRef idx="1">
+            <a:schemeClr val="accent1"/>
+          </a:lnRef>
+          <a:fillRef idx="3">
+            <a:schemeClr val="accent1"/>
+          </a:fillRef>
+          <a:effectRef idx="2">
+            <a:schemeClr val="accent1"/>
+          </a:effectRef>
+          <a:fontRef idx="minor">
+            <a:schemeClr val="lt1"/>
+          </a:fontRef>
+        </p:style>
+        <p:txBody>
+          <a:bodyPr rtlCol="0" anchor="ctr"/>
+          <a:lstStyle/>
+          <a:p>
+            <a:pPr algn="ctr"/>
+          </a:p>
+        </p:txBody>
+      </p:sp>
+      <p:sp>
+        <p:nvSpPr>
+          <p:cNvPr id="26" name="TextBox 25"/>
+          <p:cNvSpPr txBox="1"/>
+          <p:nvPr/>
+        </p:nvSpPr>
+        <p:spPr>
+          <a:xfrm>
+            <a:off x="3547872" y="3730752"/>
+            <a:ext cx="7955279" cy="475488"/>
+          </a:xfrm>
+          <a:prstGeom prst="rect">
+            <a:avLst/>
+          </a:prstGeom>
+          <a:noFill/>
+        </p:spPr>
+        <p:txBody>
+          <a:bodyPr wrap="square" lIns="0" rIns="0" tIns="0" bIns="0" anchor="ctr">
+            <a:spAutoFit/>
+          </a:bodyPr>
+          <a:lstStyle/>
+          <a:p>
+            <a:pPr algn="l">
+              <a:lnSpc>
+                <a:spcPct val="100000"/>
+              </a:lnSpc>
+            </a:pPr>
+            <a:r>
+              <a:rPr sz="1100" b="0">
+                <a:solidFill>
+                  <a:srgbClr val="7A5D00"/>
+                </a:solidFill>
+                <a:latin typeface="맑은 고딕"/>
+              </a:rPr>
+              <a:t>[ 회장 확정 ]</a:t>
+            </a:r>
+          </a:p>
+        </p:txBody>
+      </p:sp>
+      <p:sp>
+        <p:nvSpPr>
+          <p:cNvPr id="27" name="Rounded Rectangle 26"/>
+          <p:cNvSpPr/>
+          <p:nvPr/>
+        </p:nvSpPr>
+        <p:spPr>
+          <a:xfrm>
+            <a:off x="640080" y="4663440"/>
+            <a:ext cx="10972800" cy="1554480"/>
+          </a:xfrm>
+          <a:prstGeom prst="roundRect">
+            <a:avLst/>
+          </a:prstGeom>
+          <a:solidFill>
+            <a:srgbClr val="12347A"/>
+          </a:solidFill>
+          <a:ln>
+            <a:noFill/>
+          </a:ln>
+          <a:effectLst/>
+        </p:spPr>
+        <p:style>
+          <a:lnRef idx="1">
+            <a:schemeClr val="accent1"/>
+          </a:lnRef>
+          <a:fillRef idx="3">
+            <a:schemeClr val="accent1"/>
+          </a:fillRef>
+          <a:effectRef idx="2">
+            <a:schemeClr val="accent1"/>
+          </a:effectRef>
+          <a:fontRef idx="minor">
+            <a:schemeClr val="lt1"/>
+          </a:fontRef>
+        </p:style>
+        <p:txBody>
+          <a:bodyPr rtlCol="0" anchor="ctr"/>
+          <a:lstStyle/>
+          <a:p>
+            <a:pPr algn="ctr"/>
+          </a:p>
+        </p:txBody>
+      </p:sp>
+      <p:sp>
+        <p:nvSpPr>
+          <p:cNvPr id="28" name="TextBox 27"/>
+          <p:cNvSpPr txBox="1"/>
+          <p:nvPr/>
+        </p:nvSpPr>
+        <p:spPr>
+          <a:xfrm>
+            <a:off x="640080" y="4937760"/>
+            <a:ext cx="10972800" cy="365760"/>
+          </a:xfrm>
+          <a:prstGeom prst="rect">
+            <a:avLst/>
+          </a:prstGeom>
+          <a:noFill/>
+        </p:spPr>
+        <p:txBody>
+          <a:bodyPr wrap="square" lIns="0" rIns="0" tIns="0" bIns="0" anchor="t">
+            <a:spAutoFit/>
+          </a:bodyPr>
+          <a:lstStyle/>
+          <a:p>
+            <a:pPr algn="ctr">
+              <a:lnSpc>
+                <a:spcPct val="100000"/>
+              </a:lnSpc>
+            </a:pPr>
+            <a:r>
+              <a:rPr sz="1300" b="1">
+                <a:solidFill>
+                  <a:srgbClr val="CADCFC"/>
+                </a:solidFill>
+                <a:latin typeface="맑은 고딕"/>
+              </a:rPr>
+              <a:t>EDGE COMPANY CO., LTD.</a:t>
+            </a:r>
+          </a:p>
+        </p:txBody>
+      </p:sp>
+      <p:sp>
+        <p:nvSpPr>
+          <p:cNvPr id="29" name="TextBox 28"/>
+          <p:cNvSpPr txBox="1"/>
+          <p:nvPr/>
+        </p:nvSpPr>
+        <p:spPr>
+          <a:xfrm>
+            <a:off x="640080" y="5349240"/>
+            <a:ext cx="10972800" cy="457200"/>
+          </a:xfrm>
+          <a:prstGeom prst="rect">
+            <a:avLst/>
+          </a:prstGeom>
+          <a:noFill/>
+        </p:spPr>
+        <p:txBody>
+          <a:bodyPr wrap="square" lIns="0" rIns="0" tIns="0" bIns="0" anchor="t">
+            <a:spAutoFit/>
+          </a:bodyPr>
+          <a:lstStyle/>
+          <a:p>
+            <a:pPr algn="ctr">
+              <a:lnSpc>
+                <a:spcPct val="100000"/>
+              </a:lnSpc>
+            </a:pPr>
+            <a:r>
+              <a:rPr sz="2400" b="1">
+                <a:solidFill>
+                  <a:srgbClr val="FFFFFF"/>
+                </a:solidFill>
+                <a:latin typeface="맑은 고딕"/>
+              </a:rPr>
+              <a:t>㈜엣지컴퍼니</a:t>
+            </a:r>
+          </a:p>
+        </p:txBody>
+      </p:sp>
+      <p:sp>
+        <p:nvSpPr>
+          <p:cNvPr id="30" name="TextBox 29"/>
+          <p:cNvSpPr txBox="1"/>
+          <p:nvPr/>
+        </p:nvSpPr>
+        <p:spPr>
+          <a:xfrm>
+            <a:off x="640080" y="5897880"/>
+            <a:ext cx="10972800" cy="274320"/>
+          </a:xfrm>
+          <a:prstGeom prst="rect">
+            <a:avLst/>
+          </a:prstGeom>
+          <a:noFill/>
+        </p:spPr>
+        <p:txBody>
+          <a:bodyPr wrap="square" lIns="0" rIns="0" tIns="0" bIns="0" anchor="t">
+            <a:spAutoFit/>
+          </a:bodyPr>
+          <a:lstStyle/>
+          <a:p>
+            <a:pPr algn="ctr">
+              <a:lnSpc>
+                <a:spcPct val="100000"/>
+              </a:lnSpc>
+            </a:pPr>
+            <a:r>
+              <a:rPr sz="1150" b="0">
+                <a:solidFill>
+                  <a:srgbClr val="CADCFC"/>
+                </a:solidFill>
+                <a:latin typeface="맑은 고딕"/>
+              </a:rPr>
+              <a:t>ACRO 스마트홈 제품 제조·공급 · 스마트홈 시스템 개발 · 실내/경관 조명</a:t>
             </a:r>
           </a:p>
         </p:txBody>
